--- a/presentation.pptx
+++ b/presentation.pptx
@@ -3,15 +3,17 @@
 <p:presentation xmlns:a="http://schemas.openxmlformats.org/drawingml/2006/main" xmlns:p="http://schemas.openxmlformats.org/presentationml/2006/main" xmlns:r="http://schemas.openxmlformats.org/officeDocument/2006/relationships" xmlns:p14="http://schemas.microsoft.com/office/powerpoint/2010/main" xmlns:p15="http://schemas.microsoft.com/office/powerpoint/2012/main" xmlns:mc="http://schemas.openxmlformats.org/markup-compatibility/2006">
   <p:sldMasterIdLst>
     <p:sldMasterId id="2147483648" r:id="rId2"/>
+    <p:sldMasterId id="2147483661" r:id="rId3"/>
   </p:sldMasterIdLst>
   <p:sldIdLst>
-    <p:sldId id="256" r:id="rId3"/>
-    <p:sldId id="257" r:id="rId4"/>
-    <p:sldId id="258" r:id="rId5"/>
-    <p:sldId id="259" r:id="rId6"/>
-    <p:sldId id="260" r:id="rId7"/>
-    <p:sldId id="261" r:id="rId8"/>
-    <p:sldId id="262" r:id="rId9"/>
+    <p:sldId id="256" r:id="rId4"/>
+    <p:sldId id="257" r:id="rId5"/>
+    <p:sldId id="258" r:id="rId6"/>
+    <p:sldId id="259" r:id="rId7"/>
+    <p:sldId id="260" r:id="rId8"/>
+    <p:sldId id="261" r:id="rId9"/>
+    <p:sldId id="262" r:id="rId10"/>
+    <p:sldId id="263" r:id="rId11"/>
   </p:sldIdLst>
   <p:sldSz cx="12192000" cy="6858000"/>
   <p:notesSz cx="7772400" cy="10058400"/>
@@ -69,7 +71,7 @@
         <p:txBody>
           <a:bodyPr/>
           <a:p>
-            <a:fld id="{6A9465CB-1F7D-48D4-AB61-E9EDA06DD3FF}" type="slidenum">
+            <a:fld id="{0801495B-01BB-4F9A-8D74-594CB190DCD6}" type="slidenum">
               <a:t>&lt;#&gt;</a:t>
             </a:fld>
           </a:p>
@@ -146,14 +148,14 @@
             <a:noAutofit/>
           </a:bodyPr>
           <a:p>
-            <a:pPr indent="0" algn="ctr">
+            <a:pPr indent="0">
               <a:buNone/>
             </a:pPr>
-            <a:endParaRPr b="0" lang="en-US" sz="4400" spc="-1" strike="noStrike">
-              <a:solidFill>
-                <a:srgbClr val="000000"/>
-              </a:solidFill>
-              <a:latin typeface="Arial"/>
+            <a:endParaRPr b="0" lang="en-US" sz="1800" spc="-1" strike="noStrike">
+              <a:solidFill>
+                <a:srgbClr val="000000"/>
+              </a:solidFill>
+              <a:latin typeface="Calibri"/>
             </a:endParaRPr>
           </a:p>
         </p:txBody>
@@ -196,7 +198,7 @@
               <a:solidFill>
                 <a:srgbClr val="000000"/>
               </a:solidFill>
-              <a:latin typeface="Arial"/>
+              <a:latin typeface="Calibri"/>
             </a:endParaRPr>
           </a:p>
         </p:txBody>
@@ -239,7 +241,7 @@
               <a:solidFill>
                 <a:srgbClr val="000000"/>
               </a:solidFill>
-              <a:latin typeface="Arial"/>
+              <a:latin typeface="Calibri"/>
             </a:endParaRPr>
           </a:p>
         </p:txBody>
@@ -278,7 +280,7 @@
         <p:txBody>
           <a:bodyPr/>
           <a:p>
-            <a:fld id="{E2841CC5-B8A9-433F-8B20-AEAD460A44DF}" type="slidenum">
+            <a:fld id="{D2398599-836D-4DDF-9BC2-22A03A51CE83}" type="slidenum">
               <a:t>&lt;#&gt;</a:t>
             </a:fld>
           </a:p>
@@ -355,14 +357,14 @@
             <a:noAutofit/>
           </a:bodyPr>
           <a:p>
-            <a:pPr indent="0" algn="ctr">
+            <a:pPr indent="0">
               <a:buNone/>
             </a:pPr>
-            <a:endParaRPr b="0" lang="en-US" sz="4400" spc="-1" strike="noStrike">
-              <a:solidFill>
-                <a:srgbClr val="000000"/>
-              </a:solidFill>
-              <a:latin typeface="Arial"/>
+            <a:endParaRPr b="0" lang="en-US" sz="1800" spc="-1" strike="noStrike">
+              <a:solidFill>
+                <a:srgbClr val="000000"/>
+              </a:solidFill>
+              <a:latin typeface="Calibri"/>
             </a:endParaRPr>
           </a:p>
         </p:txBody>
@@ -405,7 +407,7 @@
               <a:solidFill>
                 <a:srgbClr val="000000"/>
               </a:solidFill>
-              <a:latin typeface="Arial"/>
+              <a:latin typeface="Calibri"/>
             </a:endParaRPr>
           </a:p>
         </p:txBody>
@@ -448,7 +450,7 @@
               <a:solidFill>
                 <a:srgbClr val="000000"/>
               </a:solidFill>
-              <a:latin typeface="Arial"/>
+              <a:latin typeface="Calibri"/>
             </a:endParaRPr>
           </a:p>
         </p:txBody>
@@ -491,7 +493,7 @@
               <a:solidFill>
                 <a:srgbClr val="000000"/>
               </a:solidFill>
-              <a:latin typeface="Arial"/>
+              <a:latin typeface="Calibri"/>
             </a:endParaRPr>
           </a:p>
         </p:txBody>
@@ -534,7 +536,7 @@
               <a:solidFill>
                 <a:srgbClr val="000000"/>
               </a:solidFill>
-              <a:latin typeface="Arial"/>
+              <a:latin typeface="Calibri"/>
             </a:endParaRPr>
           </a:p>
         </p:txBody>
@@ -573,7 +575,7 @@
         <p:txBody>
           <a:bodyPr/>
           <a:p>
-            <a:fld id="{6C79B108-D0A6-4D4C-942A-EE8F9A77CC3B}" type="slidenum">
+            <a:fld id="{CDD95777-E78E-4B2A-854C-8CA9F21208A0}" type="slidenum">
               <a:t>&lt;#&gt;</a:t>
             </a:fld>
           </a:p>
@@ -650,14 +652,14 @@
             <a:noAutofit/>
           </a:bodyPr>
           <a:p>
-            <a:pPr indent="0" algn="ctr">
+            <a:pPr indent="0">
               <a:buNone/>
             </a:pPr>
-            <a:endParaRPr b="0" lang="en-US" sz="4400" spc="-1" strike="noStrike">
-              <a:solidFill>
-                <a:srgbClr val="000000"/>
-              </a:solidFill>
-              <a:latin typeface="Arial"/>
+            <a:endParaRPr b="0" lang="en-US" sz="1800" spc="-1" strike="noStrike">
+              <a:solidFill>
+                <a:srgbClr val="000000"/>
+              </a:solidFill>
+              <a:latin typeface="Calibri"/>
             </a:endParaRPr>
           </a:p>
         </p:txBody>
@@ -700,7 +702,7 @@
               <a:solidFill>
                 <a:srgbClr val="000000"/>
               </a:solidFill>
-              <a:latin typeface="Arial"/>
+              <a:latin typeface="Calibri"/>
             </a:endParaRPr>
           </a:p>
         </p:txBody>
@@ -743,7 +745,7 @@
               <a:solidFill>
                 <a:srgbClr val="000000"/>
               </a:solidFill>
-              <a:latin typeface="Arial"/>
+              <a:latin typeface="Calibri"/>
             </a:endParaRPr>
           </a:p>
         </p:txBody>
@@ -786,7 +788,7 @@
               <a:solidFill>
                 <a:srgbClr val="000000"/>
               </a:solidFill>
-              <a:latin typeface="Arial"/>
+              <a:latin typeface="Calibri"/>
             </a:endParaRPr>
           </a:p>
         </p:txBody>
@@ -829,7 +831,7 @@
               <a:solidFill>
                 <a:srgbClr val="000000"/>
               </a:solidFill>
-              <a:latin typeface="Arial"/>
+              <a:latin typeface="Calibri"/>
             </a:endParaRPr>
           </a:p>
         </p:txBody>
@@ -872,7 +874,7 @@
               <a:solidFill>
                 <a:srgbClr val="000000"/>
               </a:solidFill>
-              <a:latin typeface="Arial"/>
+              <a:latin typeface="Calibri"/>
             </a:endParaRPr>
           </a:p>
         </p:txBody>
@@ -915,7 +917,7 @@
               <a:solidFill>
                 <a:srgbClr val="000000"/>
               </a:solidFill>
-              <a:latin typeface="Arial"/>
+              <a:latin typeface="Calibri"/>
             </a:endParaRPr>
           </a:p>
         </p:txBody>
@@ -954,7 +956,7 @@
         <p:txBody>
           <a:bodyPr/>
           <a:p>
-            <a:fld id="{5CF015FD-035C-47C7-9FB0-15E3AFD1B7D4}" type="slidenum">
+            <a:fld id="{4A980052-BFD0-4199-9004-BA0733ABE912}" type="slidenum">
               <a:t>&lt;#&gt;</a:t>
             </a:fld>
           </a:p>
@@ -968,6 +970,1123 @@
           </p:cNvSpPr>
           <p:nvPr>
             <p:ph type="dt" idx="3"/>
+          </p:nvPr>
+        </p:nvSpPr>
+        <p:spPr/>
+        <p:txBody>
+          <a:bodyPr/>
+          <a:p>
+            <a:r>
+              <a:rPr lang="en-US"/>
+              <a:t/>
+            </a:r>
+          </a:p>
+        </p:txBody>
+      </p:sp>
+    </p:spTree>
+  </p:cSld>
+</p:sldLayout>
+</file>
+
+<file path=ppt/slideLayouts/slideLayout13.xml><?xml version="1.0" encoding="utf-8"?>
+<p:sldLayout xmlns:a="http://schemas.openxmlformats.org/drawingml/2006/main" xmlns:p="http://schemas.openxmlformats.org/presentationml/2006/main" xmlns:r="http://schemas.openxmlformats.org/officeDocument/2006/relationships" xmlns:p14="http://schemas.microsoft.com/office/powerpoint/2010/main" xmlns:p15="http://schemas.microsoft.com/office/powerpoint/2012/main" xmlns:mc="http://schemas.openxmlformats.org/markup-compatibility/2006" type="blank" preserve="1">
+  <p:cSld name="Blank Slide">
+    <p:spTree>
+      <p:nvGrpSpPr>
+        <p:cNvPr id="1" name=""/>
+        <p:cNvGrpSpPr/>
+        <p:nvPr/>
+      </p:nvGrpSpPr>
+      <p:grpSpPr>
+        <a:xfrm>
+          <a:off x="0" y="0"/>
+          <a:ext cx="0" cy="0"/>
+          <a:chOff x="0" y="0"/>
+          <a:chExt cx="0" cy="0"/>
+        </a:xfrm>
+      </p:grpSpPr>
+      <p:sp>
+        <p:nvSpPr>
+          <p:cNvPr id="2" name="PlaceHolder 1"/>
+          <p:cNvSpPr>
+            <a:spLocks noGrp="1"/>
+          </p:cNvSpPr>
+          <p:nvPr>
+            <p:ph type="ftr" idx="5"/>
+          </p:nvPr>
+        </p:nvSpPr>
+        <p:spPr/>
+        <p:txBody>
+          <a:bodyPr/>
+          <a:p>
+            <a:r>
+              <a:t>Footer</a:t>
+            </a:r>
+          </a:p>
+        </p:txBody>
+      </p:sp>
+      <p:sp>
+        <p:nvSpPr>
+          <p:cNvPr id="3" name="PlaceHolder 2"/>
+          <p:cNvSpPr>
+            <a:spLocks noGrp="1"/>
+          </p:cNvSpPr>
+          <p:nvPr>
+            <p:ph type="sldNum" idx="6"/>
+          </p:nvPr>
+        </p:nvSpPr>
+        <p:spPr/>
+        <p:txBody>
+          <a:bodyPr/>
+          <a:p>
+            <a:fld id="{6B237376-B85D-454C-B83E-CB1E840E3A5B}" type="slidenum">
+              <a:t>&lt;#&gt;</a:t>
+            </a:fld>
+          </a:p>
+        </p:txBody>
+      </p:sp>
+      <p:sp>
+        <p:nvSpPr>
+          <p:cNvPr id="4" name="PlaceHolder 3"/>
+          <p:cNvSpPr>
+            <a:spLocks noGrp="1"/>
+          </p:cNvSpPr>
+          <p:nvPr>
+            <p:ph type="dt" idx="4"/>
+          </p:nvPr>
+        </p:nvSpPr>
+        <p:spPr/>
+        <p:txBody>
+          <a:bodyPr/>
+          <a:p>
+            <a:r>
+              <a:rPr lang="en-US"/>
+              <a:t/>
+            </a:r>
+          </a:p>
+        </p:txBody>
+      </p:sp>
+    </p:spTree>
+  </p:cSld>
+</p:sldLayout>
+</file>
+
+<file path=ppt/slideLayouts/slideLayout14.xml><?xml version="1.0" encoding="utf-8"?>
+<p:sldLayout xmlns:a="http://schemas.openxmlformats.org/drawingml/2006/main" xmlns:p="http://schemas.openxmlformats.org/presentationml/2006/main" xmlns:r="http://schemas.openxmlformats.org/officeDocument/2006/relationships" xmlns:p14="http://schemas.microsoft.com/office/powerpoint/2010/main" xmlns:p15="http://schemas.microsoft.com/office/powerpoint/2012/main" xmlns:mc="http://schemas.openxmlformats.org/markup-compatibility/2006" type="tx" preserve="1">
+  <p:cSld name="Title Slide">
+    <p:spTree>
+      <p:nvGrpSpPr>
+        <p:cNvPr id="1" name=""/>
+        <p:cNvGrpSpPr/>
+        <p:nvPr/>
+      </p:nvGrpSpPr>
+      <p:grpSpPr>
+        <a:xfrm>
+          <a:off x="0" y="0"/>
+          <a:ext cx="0" cy="0"/>
+          <a:chOff x="0" y="0"/>
+          <a:chExt cx="0" cy="0"/>
+        </a:xfrm>
+      </p:grpSpPr>
+      <p:sp>
+        <p:nvSpPr>
+          <p:cNvPr id="46" name="PlaceHolder 1"/>
+          <p:cNvSpPr>
+            <a:spLocks noGrp="1"/>
+          </p:cNvSpPr>
+          <p:nvPr>
+            <p:ph type="title"/>
+          </p:nvPr>
+        </p:nvSpPr>
+        <p:spPr>
+          <a:xfrm>
+            <a:off x="609480" y="273600"/>
+            <a:ext cx="10972440" cy="1144800"/>
+          </a:xfrm>
+          <a:prstGeom prst="rect">
+            <a:avLst/>
+          </a:prstGeom>
+          <a:noFill/>
+          <a:ln w="0">
+            <a:noFill/>
+          </a:ln>
+        </p:spPr>
+        <p:txBody>
+          <a:bodyPr lIns="0" rIns="0" tIns="0" bIns="0" anchor="ctr">
+            <a:noAutofit/>
+          </a:bodyPr>
+          <a:p>
+            <a:pPr indent="0">
+              <a:buNone/>
+            </a:pPr>
+            <a:endParaRPr b="0" lang="en-US" sz="1800" spc="-1" strike="noStrike">
+              <a:solidFill>
+                <a:srgbClr val="000000"/>
+              </a:solidFill>
+              <a:latin typeface="Calibri"/>
+            </a:endParaRPr>
+          </a:p>
+        </p:txBody>
+      </p:sp>
+      <p:sp>
+        <p:nvSpPr>
+          <p:cNvPr id="47" name="PlaceHolder 2"/>
+          <p:cNvSpPr>
+            <a:spLocks noGrp="1"/>
+          </p:cNvSpPr>
+          <p:nvPr>
+            <p:ph type="subTitle"/>
+          </p:nvPr>
+        </p:nvSpPr>
+        <p:spPr>
+          <a:xfrm>
+            <a:off x="609480" y="1604520"/>
+            <a:ext cx="10972440" cy="3977280"/>
+          </a:xfrm>
+          <a:prstGeom prst="rect">
+            <a:avLst/>
+          </a:prstGeom>
+          <a:noFill/>
+          <a:ln w="0">
+            <a:noFill/>
+          </a:ln>
+        </p:spPr>
+        <p:txBody>
+          <a:bodyPr lIns="0" rIns="0" tIns="0" bIns="0" anchor="ctr">
+            <a:noAutofit/>
+          </a:bodyPr>
+          <a:p>
+            <a:pPr indent="0" algn="ctr">
+              <a:buNone/>
+            </a:pPr>
+            <a:endParaRPr b="0" lang="en-US" sz="3200" spc="-1" strike="noStrike">
+              <a:solidFill>
+                <a:srgbClr val="000000"/>
+              </a:solidFill>
+              <a:latin typeface="Arial"/>
+            </a:endParaRPr>
+          </a:p>
+        </p:txBody>
+      </p:sp>
+      <p:sp>
+        <p:nvSpPr>
+          <p:cNvPr id="4" name="PlaceHolder 3"/>
+          <p:cNvSpPr>
+            <a:spLocks noGrp="1"/>
+          </p:cNvSpPr>
+          <p:nvPr>
+            <p:ph type="ftr" idx="5"/>
+          </p:nvPr>
+        </p:nvSpPr>
+        <p:spPr/>
+        <p:txBody>
+          <a:bodyPr/>
+          <a:p>
+            <a:r>
+              <a:t>Footer</a:t>
+            </a:r>
+          </a:p>
+        </p:txBody>
+      </p:sp>
+      <p:sp>
+        <p:nvSpPr>
+          <p:cNvPr id="5" name="PlaceHolder 4"/>
+          <p:cNvSpPr>
+            <a:spLocks noGrp="1"/>
+          </p:cNvSpPr>
+          <p:nvPr>
+            <p:ph type="sldNum" idx="6"/>
+          </p:nvPr>
+        </p:nvSpPr>
+        <p:spPr/>
+        <p:txBody>
+          <a:bodyPr/>
+          <a:p>
+            <a:fld id="{AB485998-2114-42C7-8C3B-DCC58AEF0270}" type="slidenum">
+              <a:t>&lt;#&gt;</a:t>
+            </a:fld>
+          </a:p>
+        </p:txBody>
+      </p:sp>
+      <p:sp>
+        <p:nvSpPr>
+          <p:cNvPr id="6" name="PlaceHolder 5"/>
+          <p:cNvSpPr>
+            <a:spLocks noGrp="1"/>
+          </p:cNvSpPr>
+          <p:nvPr>
+            <p:ph type="dt" idx="4"/>
+          </p:nvPr>
+        </p:nvSpPr>
+        <p:spPr/>
+        <p:txBody>
+          <a:bodyPr/>
+          <a:p>
+            <a:r>
+              <a:rPr lang="en-US"/>
+              <a:t/>
+            </a:r>
+          </a:p>
+        </p:txBody>
+      </p:sp>
+    </p:spTree>
+  </p:cSld>
+</p:sldLayout>
+</file>
+
+<file path=ppt/slideLayouts/slideLayout15.xml><?xml version="1.0" encoding="utf-8"?>
+<p:sldLayout xmlns:a="http://schemas.openxmlformats.org/drawingml/2006/main" xmlns:p="http://schemas.openxmlformats.org/presentationml/2006/main" xmlns:r="http://schemas.openxmlformats.org/officeDocument/2006/relationships" xmlns:p14="http://schemas.microsoft.com/office/powerpoint/2010/main" xmlns:p15="http://schemas.microsoft.com/office/powerpoint/2012/main" xmlns:mc="http://schemas.openxmlformats.org/markup-compatibility/2006" type="obj" preserve="1">
+  <p:cSld name="Title, Content">
+    <p:spTree>
+      <p:nvGrpSpPr>
+        <p:cNvPr id="1" name=""/>
+        <p:cNvGrpSpPr/>
+        <p:nvPr/>
+      </p:nvGrpSpPr>
+      <p:grpSpPr>
+        <a:xfrm>
+          <a:off x="0" y="0"/>
+          <a:ext cx="0" cy="0"/>
+          <a:chOff x="0" y="0"/>
+          <a:chExt cx="0" cy="0"/>
+        </a:xfrm>
+      </p:grpSpPr>
+      <p:sp>
+        <p:nvSpPr>
+          <p:cNvPr id="48" name="PlaceHolder 1"/>
+          <p:cNvSpPr>
+            <a:spLocks noGrp="1"/>
+          </p:cNvSpPr>
+          <p:nvPr>
+            <p:ph type="title"/>
+          </p:nvPr>
+        </p:nvSpPr>
+        <p:spPr>
+          <a:xfrm>
+            <a:off x="609480" y="273600"/>
+            <a:ext cx="10972440" cy="1144800"/>
+          </a:xfrm>
+          <a:prstGeom prst="rect">
+            <a:avLst/>
+          </a:prstGeom>
+          <a:noFill/>
+          <a:ln w="0">
+            <a:noFill/>
+          </a:ln>
+        </p:spPr>
+        <p:txBody>
+          <a:bodyPr lIns="0" rIns="0" tIns="0" bIns="0" anchor="ctr">
+            <a:noAutofit/>
+          </a:bodyPr>
+          <a:p>
+            <a:pPr indent="0">
+              <a:buNone/>
+            </a:pPr>
+            <a:endParaRPr b="0" lang="en-US" sz="1800" spc="-1" strike="noStrike">
+              <a:solidFill>
+                <a:srgbClr val="000000"/>
+              </a:solidFill>
+              <a:latin typeface="Calibri"/>
+            </a:endParaRPr>
+          </a:p>
+        </p:txBody>
+      </p:sp>
+      <p:sp>
+        <p:nvSpPr>
+          <p:cNvPr id="49" name="PlaceHolder 2"/>
+          <p:cNvSpPr>
+            <a:spLocks noGrp="1"/>
+          </p:cNvSpPr>
+          <p:nvPr>
+            <p:ph/>
+          </p:nvPr>
+        </p:nvSpPr>
+        <p:spPr>
+          <a:xfrm>
+            <a:off x="609480" y="1604520"/>
+            <a:ext cx="10972440" cy="3977280"/>
+          </a:xfrm>
+          <a:prstGeom prst="rect">
+            <a:avLst/>
+          </a:prstGeom>
+          <a:noFill/>
+          <a:ln w="0">
+            <a:noFill/>
+          </a:ln>
+        </p:spPr>
+        <p:txBody>
+          <a:bodyPr lIns="0" rIns="0" tIns="0" bIns="0" anchor="t">
+            <a:normAutofit/>
+          </a:bodyPr>
+          <a:p>
+            <a:pPr indent="0">
+              <a:spcBef>
+                <a:spcPts val="1417"/>
+              </a:spcBef>
+              <a:buNone/>
+            </a:pPr>
+            <a:endParaRPr b="0" lang="en-US" sz="3200" spc="-1" strike="noStrike">
+              <a:solidFill>
+                <a:srgbClr val="000000"/>
+              </a:solidFill>
+              <a:latin typeface="Calibri"/>
+            </a:endParaRPr>
+          </a:p>
+        </p:txBody>
+      </p:sp>
+      <p:sp>
+        <p:nvSpPr>
+          <p:cNvPr id="4" name="PlaceHolder 3"/>
+          <p:cNvSpPr>
+            <a:spLocks noGrp="1"/>
+          </p:cNvSpPr>
+          <p:nvPr>
+            <p:ph type="ftr" idx="5"/>
+          </p:nvPr>
+        </p:nvSpPr>
+        <p:spPr/>
+        <p:txBody>
+          <a:bodyPr/>
+          <a:p>
+            <a:r>
+              <a:t>Footer</a:t>
+            </a:r>
+          </a:p>
+        </p:txBody>
+      </p:sp>
+      <p:sp>
+        <p:nvSpPr>
+          <p:cNvPr id="5" name="PlaceHolder 4"/>
+          <p:cNvSpPr>
+            <a:spLocks noGrp="1"/>
+          </p:cNvSpPr>
+          <p:nvPr>
+            <p:ph type="sldNum" idx="6"/>
+          </p:nvPr>
+        </p:nvSpPr>
+        <p:spPr/>
+        <p:txBody>
+          <a:bodyPr/>
+          <a:p>
+            <a:fld id="{0B12617F-BA02-46CF-98E4-6BBAEE8ED613}" type="slidenum">
+              <a:t>&lt;#&gt;</a:t>
+            </a:fld>
+          </a:p>
+        </p:txBody>
+      </p:sp>
+      <p:sp>
+        <p:nvSpPr>
+          <p:cNvPr id="6" name="PlaceHolder 5"/>
+          <p:cNvSpPr>
+            <a:spLocks noGrp="1"/>
+          </p:cNvSpPr>
+          <p:nvPr>
+            <p:ph type="dt" idx="4"/>
+          </p:nvPr>
+        </p:nvSpPr>
+        <p:spPr/>
+        <p:txBody>
+          <a:bodyPr/>
+          <a:p>
+            <a:r>
+              <a:rPr lang="en-US"/>
+              <a:t/>
+            </a:r>
+          </a:p>
+        </p:txBody>
+      </p:sp>
+    </p:spTree>
+  </p:cSld>
+</p:sldLayout>
+</file>
+
+<file path=ppt/slideLayouts/slideLayout16.xml><?xml version="1.0" encoding="utf-8"?>
+<p:sldLayout xmlns:a="http://schemas.openxmlformats.org/drawingml/2006/main" xmlns:p="http://schemas.openxmlformats.org/presentationml/2006/main" xmlns:r="http://schemas.openxmlformats.org/officeDocument/2006/relationships" xmlns:p14="http://schemas.microsoft.com/office/powerpoint/2010/main" xmlns:p15="http://schemas.microsoft.com/office/powerpoint/2012/main" xmlns:mc="http://schemas.openxmlformats.org/markup-compatibility/2006" type="twoObj" preserve="1">
+  <p:cSld name="Title, 2 Content">
+    <p:spTree>
+      <p:nvGrpSpPr>
+        <p:cNvPr id="1" name=""/>
+        <p:cNvGrpSpPr/>
+        <p:nvPr/>
+      </p:nvGrpSpPr>
+      <p:grpSpPr>
+        <a:xfrm>
+          <a:off x="0" y="0"/>
+          <a:ext cx="0" cy="0"/>
+          <a:chOff x="0" y="0"/>
+          <a:chExt cx="0" cy="0"/>
+        </a:xfrm>
+      </p:grpSpPr>
+      <p:sp>
+        <p:nvSpPr>
+          <p:cNvPr id="50" name="PlaceHolder 1"/>
+          <p:cNvSpPr>
+            <a:spLocks noGrp="1"/>
+          </p:cNvSpPr>
+          <p:nvPr>
+            <p:ph type="title"/>
+          </p:nvPr>
+        </p:nvSpPr>
+        <p:spPr>
+          <a:xfrm>
+            <a:off x="609480" y="273600"/>
+            <a:ext cx="10972440" cy="1144800"/>
+          </a:xfrm>
+          <a:prstGeom prst="rect">
+            <a:avLst/>
+          </a:prstGeom>
+          <a:noFill/>
+          <a:ln w="0">
+            <a:noFill/>
+          </a:ln>
+        </p:spPr>
+        <p:txBody>
+          <a:bodyPr lIns="0" rIns="0" tIns="0" bIns="0" anchor="ctr">
+            <a:noAutofit/>
+          </a:bodyPr>
+          <a:p>
+            <a:pPr indent="0">
+              <a:buNone/>
+            </a:pPr>
+            <a:endParaRPr b="0" lang="en-US" sz="1800" spc="-1" strike="noStrike">
+              <a:solidFill>
+                <a:srgbClr val="000000"/>
+              </a:solidFill>
+              <a:latin typeface="Calibri"/>
+            </a:endParaRPr>
+          </a:p>
+        </p:txBody>
+      </p:sp>
+      <p:sp>
+        <p:nvSpPr>
+          <p:cNvPr id="51" name="PlaceHolder 2"/>
+          <p:cNvSpPr>
+            <a:spLocks noGrp="1"/>
+          </p:cNvSpPr>
+          <p:nvPr>
+            <p:ph/>
+          </p:nvPr>
+        </p:nvSpPr>
+        <p:spPr>
+          <a:xfrm>
+            <a:off x="609480" y="1604520"/>
+            <a:ext cx="5354280" cy="3977280"/>
+          </a:xfrm>
+          <a:prstGeom prst="rect">
+            <a:avLst/>
+          </a:prstGeom>
+          <a:noFill/>
+          <a:ln w="0">
+            <a:noFill/>
+          </a:ln>
+        </p:spPr>
+        <p:txBody>
+          <a:bodyPr lIns="0" rIns="0" tIns="0" bIns="0" anchor="t">
+            <a:normAutofit/>
+          </a:bodyPr>
+          <a:p>
+            <a:pPr indent="0">
+              <a:spcBef>
+                <a:spcPts val="1417"/>
+              </a:spcBef>
+              <a:buNone/>
+            </a:pPr>
+            <a:endParaRPr b="0" lang="en-US" sz="3200" spc="-1" strike="noStrike">
+              <a:solidFill>
+                <a:srgbClr val="000000"/>
+              </a:solidFill>
+              <a:latin typeface="Calibri"/>
+            </a:endParaRPr>
+          </a:p>
+        </p:txBody>
+      </p:sp>
+      <p:sp>
+        <p:nvSpPr>
+          <p:cNvPr id="52" name="PlaceHolder 3"/>
+          <p:cNvSpPr>
+            <a:spLocks noGrp="1"/>
+          </p:cNvSpPr>
+          <p:nvPr>
+            <p:ph/>
+          </p:nvPr>
+        </p:nvSpPr>
+        <p:spPr>
+          <a:xfrm>
+            <a:off x="6231960" y="1604520"/>
+            <a:ext cx="5354280" cy="3977280"/>
+          </a:xfrm>
+          <a:prstGeom prst="rect">
+            <a:avLst/>
+          </a:prstGeom>
+          <a:noFill/>
+          <a:ln w="0">
+            <a:noFill/>
+          </a:ln>
+        </p:spPr>
+        <p:txBody>
+          <a:bodyPr lIns="0" rIns="0" tIns="0" bIns="0" anchor="t">
+            <a:normAutofit/>
+          </a:bodyPr>
+          <a:p>
+            <a:pPr indent="0">
+              <a:spcBef>
+                <a:spcPts val="1417"/>
+              </a:spcBef>
+              <a:buNone/>
+            </a:pPr>
+            <a:endParaRPr b="0" lang="en-US" sz="3200" spc="-1" strike="noStrike">
+              <a:solidFill>
+                <a:srgbClr val="000000"/>
+              </a:solidFill>
+              <a:latin typeface="Calibri"/>
+            </a:endParaRPr>
+          </a:p>
+        </p:txBody>
+      </p:sp>
+      <p:sp>
+        <p:nvSpPr>
+          <p:cNvPr id="5" name="PlaceHolder 4"/>
+          <p:cNvSpPr>
+            <a:spLocks noGrp="1"/>
+          </p:cNvSpPr>
+          <p:nvPr>
+            <p:ph type="ftr" idx="5"/>
+          </p:nvPr>
+        </p:nvSpPr>
+        <p:spPr/>
+        <p:txBody>
+          <a:bodyPr/>
+          <a:p>
+            <a:r>
+              <a:t>Footer</a:t>
+            </a:r>
+          </a:p>
+        </p:txBody>
+      </p:sp>
+      <p:sp>
+        <p:nvSpPr>
+          <p:cNvPr id="6" name="PlaceHolder 5"/>
+          <p:cNvSpPr>
+            <a:spLocks noGrp="1"/>
+          </p:cNvSpPr>
+          <p:nvPr>
+            <p:ph type="sldNum" idx="6"/>
+          </p:nvPr>
+        </p:nvSpPr>
+        <p:spPr/>
+        <p:txBody>
+          <a:bodyPr/>
+          <a:p>
+            <a:fld id="{BD1E9FF1-44A7-4347-9CCD-EF8AFA19129D}" type="slidenum">
+              <a:t>&lt;#&gt;</a:t>
+            </a:fld>
+          </a:p>
+        </p:txBody>
+      </p:sp>
+      <p:sp>
+        <p:nvSpPr>
+          <p:cNvPr id="7" name="PlaceHolder 6"/>
+          <p:cNvSpPr>
+            <a:spLocks noGrp="1"/>
+          </p:cNvSpPr>
+          <p:nvPr>
+            <p:ph type="dt" idx="4"/>
+          </p:nvPr>
+        </p:nvSpPr>
+        <p:spPr/>
+        <p:txBody>
+          <a:bodyPr/>
+          <a:p>
+            <a:r>
+              <a:rPr lang="en-US"/>
+              <a:t/>
+            </a:r>
+          </a:p>
+        </p:txBody>
+      </p:sp>
+    </p:spTree>
+  </p:cSld>
+</p:sldLayout>
+</file>
+
+<file path=ppt/slideLayouts/slideLayout17.xml><?xml version="1.0" encoding="utf-8"?>
+<p:sldLayout xmlns:a="http://schemas.openxmlformats.org/drawingml/2006/main" xmlns:p="http://schemas.openxmlformats.org/presentationml/2006/main" xmlns:r="http://schemas.openxmlformats.org/officeDocument/2006/relationships" xmlns:p14="http://schemas.microsoft.com/office/powerpoint/2010/main" xmlns:p15="http://schemas.microsoft.com/office/powerpoint/2012/main" xmlns:mc="http://schemas.openxmlformats.org/markup-compatibility/2006" type="titleOnly" preserve="1">
+  <p:cSld name="Title Only">
+    <p:spTree>
+      <p:nvGrpSpPr>
+        <p:cNvPr id="1" name=""/>
+        <p:cNvGrpSpPr/>
+        <p:nvPr/>
+      </p:nvGrpSpPr>
+      <p:grpSpPr>
+        <a:xfrm>
+          <a:off x="0" y="0"/>
+          <a:ext cx="0" cy="0"/>
+          <a:chOff x="0" y="0"/>
+          <a:chExt cx="0" cy="0"/>
+        </a:xfrm>
+      </p:grpSpPr>
+      <p:sp>
+        <p:nvSpPr>
+          <p:cNvPr id="53" name="PlaceHolder 1"/>
+          <p:cNvSpPr>
+            <a:spLocks noGrp="1"/>
+          </p:cNvSpPr>
+          <p:nvPr>
+            <p:ph type="title"/>
+          </p:nvPr>
+        </p:nvSpPr>
+        <p:spPr>
+          <a:xfrm>
+            <a:off x="609480" y="273600"/>
+            <a:ext cx="10972440" cy="1144800"/>
+          </a:xfrm>
+          <a:prstGeom prst="rect">
+            <a:avLst/>
+          </a:prstGeom>
+          <a:noFill/>
+          <a:ln w="0">
+            <a:noFill/>
+          </a:ln>
+        </p:spPr>
+        <p:txBody>
+          <a:bodyPr lIns="0" rIns="0" tIns="0" bIns="0" anchor="ctr">
+            <a:noAutofit/>
+          </a:bodyPr>
+          <a:p>
+            <a:pPr indent="0">
+              <a:buNone/>
+            </a:pPr>
+            <a:endParaRPr b="0" lang="en-US" sz="1800" spc="-1" strike="noStrike">
+              <a:solidFill>
+                <a:srgbClr val="000000"/>
+              </a:solidFill>
+              <a:latin typeface="Calibri"/>
+            </a:endParaRPr>
+          </a:p>
+        </p:txBody>
+      </p:sp>
+      <p:sp>
+        <p:nvSpPr>
+          <p:cNvPr id="3" name="PlaceHolder 2"/>
+          <p:cNvSpPr>
+            <a:spLocks noGrp="1"/>
+          </p:cNvSpPr>
+          <p:nvPr>
+            <p:ph type="ftr" idx="5"/>
+          </p:nvPr>
+        </p:nvSpPr>
+        <p:spPr/>
+        <p:txBody>
+          <a:bodyPr/>
+          <a:p>
+            <a:r>
+              <a:t>Footer</a:t>
+            </a:r>
+          </a:p>
+        </p:txBody>
+      </p:sp>
+      <p:sp>
+        <p:nvSpPr>
+          <p:cNvPr id="4" name="PlaceHolder 3"/>
+          <p:cNvSpPr>
+            <a:spLocks noGrp="1"/>
+          </p:cNvSpPr>
+          <p:nvPr>
+            <p:ph type="sldNum" idx="6"/>
+          </p:nvPr>
+        </p:nvSpPr>
+        <p:spPr/>
+        <p:txBody>
+          <a:bodyPr/>
+          <a:p>
+            <a:fld id="{8D07716B-6EEA-471B-AFD9-B01018EC0787}" type="slidenum">
+              <a:t>&lt;#&gt;</a:t>
+            </a:fld>
+          </a:p>
+        </p:txBody>
+      </p:sp>
+      <p:sp>
+        <p:nvSpPr>
+          <p:cNvPr id="5" name="PlaceHolder 4"/>
+          <p:cNvSpPr>
+            <a:spLocks noGrp="1"/>
+          </p:cNvSpPr>
+          <p:nvPr>
+            <p:ph type="dt" idx="4"/>
+          </p:nvPr>
+        </p:nvSpPr>
+        <p:spPr/>
+        <p:txBody>
+          <a:bodyPr/>
+          <a:p>
+            <a:r>
+              <a:rPr lang="en-US"/>
+              <a:t/>
+            </a:r>
+          </a:p>
+        </p:txBody>
+      </p:sp>
+    </p:spTree>
+  </p:cSld>
+</p:sldLayout>
+</file>
+
+<file path=ppt/slideLayouts/slideLayout18.xml><?xml version="1.0" encoding="utf-8"?>
+<p:sldLayout xmlns:a="http://schemas.openxmlformats.org/drawingml/2006/main" xmlns:p="http://schemas.openxmlformats.org/presentationml/2006/main" xmlns:r="http://schemas.openxmlformats.org/officeDocument/2006/relationships" xmlns:p14="http://schemas.microsoft.com/office/powerpoint/2010/main" xmlns:p15="http://schemas.microsoft.com/office/powerpoint/2012/main" xmlns:mc="http://schemas.openxmlformats.org/markup-compatibility/2006" type="objOnly" preserve="1">
+  <p:cSld name="Centered Text">
+    <p:spTree>
+      <p:nvGrpSpPr>
+        <p:cNvPr id="1" name=""/>
+        <p:cNvGrpSpPr/>
+        <p:nvPr/>
+      </p:nvGrpSpPr>
+      <p:grpSpPr>
+        <a:xfrm>
+          <a:off x="0" y="0"/>
+          <a:ext cx="0" cy="0"/>
+          <a:chOff x="0" y="0"/>
+          <a:chExt cx="0" cy="0"/>
+        </a:xfrm>
+      </p:grpSpPr>
+      <p:sp>
+        <p:nvSpPr>
+          <p:cNvPr id="54" name="PlaceHolder 1"/>
+          <p:cNvSpPr>
+            <a:spLocks noGrp="1"/>
+          </p:cNvSpPr>
+          <p:nvPr>
+            <p:ph type="subTitle"/>
+          </p:nvPr>
+        </p:nvSpPr>
+        <p:spPr>
+          <a:xfrm>
+            <a:off x="609480" y="273600"/>
+            <a:ext cx="10972440" cy="5307840"/>
+          </a:xfrm>
+          <a:prstGeom prst="rect">
+            <a:avLst/>
+          </a:prstGeom>
+          <a:noFill/>
+          <a:ln w="0">
+            <a:noFill/>
+          </a:ln>
+        </p:spPr>
+        <p:txBody>
+          <a:bodyPr lIns="0" rIns="0" tIns="0" bIns="0" anchor="ctr">
+            <a:noAutofit/>
+          </a:bodyPr>
+          <a:p>
+            <a:pPr algn="ctr"/>
+            <a:endParaRPr b="0" lang="en-US" sz="3200" spc="-1" strike="noStrike">
+              <a:solidFill>
+                <a:srgbClr val="000000"/>
+              </a:solidFill>
+              <a:latin typeface="Arial"/>
+            </a:endParaRPr>
+          </a:p>
+        </p:txBody>
+      </p:sp>
+      <p:sp>
+        <p:nvSpPr>
+          <p:cNvPr id="3" name="PlaceHolder 2"/>
+          <p:cNvSpPr>
+            <a:spLocks noGrp="1"/>
+          </p:cNvSpPr>
+          <p:nvPr>
+            <p:ph type="ftr" idx="5"/>
+          </p:nvPr>
+        </p:nvSpPr>
+        <p:spPr/>
+        <p:txBody>
+          <a:bodyPr/>
+          <a:p>
+            <a:r>
+              <a:t>Footer</a:t>
+            </a:r>
+          </a:p>
+        </p:txBody>
+      </p:sp>
+      <p:sp>
+        <p:nvSpPr>
+          <p:cNvPr id="4" name="PlaceHolder 3"/>
+          <p:cNvSpPr>
+            <a:spLocks noGrp="1"/>
+          </p:cNvSpPr>
+          <p:nvPr>
+            <p:ph type="sldNum" idx="6"/>
+          </p:nvPr>
+        </p:nvSpPr>
+        <p:spPr/>
+        <p:txBody>
+          <a:bodyPr/>
+          <a:p>
+            <a:fld id="{BC61CBE0-DF6F-4E94-B778-F5132443D368}" type="slidenum">
+              <a:t>&lt;#&gt;</a:t>
+            </a:fld>
+          </a:p>
+        </p:txBody>
+      </p:sp>
+      <p:sp>
+        <p:nvSpPr>
+          <p:cNvPr id="5" name="PlaceHolder 4"/>
+          <p:cNvSpPr>
+            <a:spLocks noGrp="1"/>
+          </p:cNvSpPr>
+          <p:nvPr>
+            <p:ph type="dt" idx="4"/>
+          </p:nvPr>
+        </p:nvSpPr>
+        <p:spPr/>
+        <p:txBody>
+          <a:bodyPr/>
+          <a:p>
+            <a:r>
+              <a:rPr lang="en-US"/>
+              <a:t/>
+            </a:r>
+          </a:p>
+        </p:txBody>
+      </p:sp>
+    </p:spTree>
+  </p:cSld>
+</p:sldLayout>
+</file>
+
+<file path=ppt/slideLayouts/slideLayout19.xml><?xml version="1.0" encoding="utf-8"?>
+<p:sldLayout xmlns:a="http://schemas.openxmlformats.org/drawingml/2006/main" xmlns:p="http://schemas.openxmlformats.org/presentationml/2006/main" xmlns:r="http://schemas.openxmlformats.org/officeDocument/2006/relationships" xmlns:p14="http://schemas.microsoft.com/office/powerpoint/2010/main" xmlns:p15="http://schemas.microsoft.com/office/powerpoint/2012/main" xmlns:mc="http://schemas.openxmlformats.org/markup-compatibility/2006" type="twoObjAndObj" preserve="1">
+  <p:cSld name="Title, 2 Content and Content">
+    <p:spTree>
+      <p:nvGrpSpPr>
+        <p:cNvPr id="1" name=""/>
+        <p:cNvGrpSpPr/>
+        <p:nvPr/>
+      </p:nvGrpSpPr>
+      <p:grpSpPr>
+        <a:xfrm>
+          <a:off x="0" y="0"/>
+          <a:ext cx="0" cy="0"/>
+          <a:chOff x="0" y="0"/>
+          <a:chExt cx="0" cy="0"/>
+        </a:xfrm>
+      </p:grpSpPr>
+      <p:sp>
+        <p:nvSpPr>
+          <p:cNvPr id="55" name="PlaceHolder 1"/>
+          <p:cNvSpPr>
+            <a:spLocks noGrp="1"/>
+          </p:cNvSpPr>
+          <p:nvPr>
+            <p:ph type="title"/>
+          </p:nvPr>
+        </p:nvSpPr>
+        <p:spPr>
+          <a:xfrm>
+            <a:off x="609480" y="273600"/>
+            <a:ext cx="10972440" cy="1144800"/>
+          </a:xfrm>
+          <a:prstGeom prst="rect">
+            <a:avLst/>
+          </a:prstGeom>
+          <a:noFill/>
+          <a:ln w="0">
+            <a:noFill/>
+          </a:ln>
+        </p:spPr>
+        <p:txBody>
+          <a:bodyPr lIns="0" rIns="0" tIns="0" bIns="0" anchor="ctr">
+            <a:noAutofit/>
+          </a:bodyPr>
+          <a:p>
+            <a:pPr indent="0">
+              <a:buNone/>
+            </a:pPr>
+            <a:endParaRPr b="0" lang="en-US" sz="1800" spc="-1" strike="noStrike">
+              <a:solidFill>
+                <a:srgbClr val="000000"/>
+              </a:solidFill>
+              <a:latin typeface="Calibri"/>
+            </a:endParaRPr>
+          </a:p>
+        </p:txBody>
+      </p:sp>
+      <p:sp>
+        <p:nvSpPr>
+          <p:cNvPr id="56" name="PlaceHolder 2"/>
+          <p:cNvSpPr>
+            <a:spLocks noGrp="1"/>
+          </p:cNvSpPr>
+          <p:nvPr>
+            <p:ph/>
+          </p:nvPr>
+        </p:nvSpPr>
+        <p:spPr>
+          <a:xfrm>
+            <a:off x="609480" y="1604520"/>
+            <a:ext cx="5354280" cy="1896840"/>
+          </a:xfrm>
+          <a:prstGeom prst="rect">
+            <a:avLst/>
+          </a:prstGeom>
+          <a:noFill/>
+          <a:ln w="0">
+            <a:noFill/>
+          </a:ln>
+        </p:spPr>
+        <p:txBody>
+          <a:bodyPr lIns="0" rIns="0" tIns="0" bIns="0" anchor="t">
+            <a:normAutofit/>
+          </a:bodyPr>
+          <a:p>
+            <a:pPr indent="0">
+              <a:spcBef>
+                <a:spcPts val="1417"/>
+              </a:spcBef>
+              <a:buNone/>
+            </a:pPr>
+            <a:endParaRPr b="0" lang="en-US" sz="3200" spc="-1" strike="noStrike">
+              <a:solidFill>
+                <a:srgbClr val="000000"/>
+              </a:solidFill>
+              <a:latin typeface="Calibri"/>
+            </a:endParaRPr>
+          </a:p>
+        </p:txBody>
+      </p:sp>
+      <p:sp>
+        <p:nvSpPr>
+          <p:cNvPr id="57" name="PlaceHolder 3"/>
+          <p:cNvSpPr>
+            <a:spLocks noGrp="1"/>
+          </p:cNvSpPr>
+          <p:nvPr>
+            <p:ph/>
+          </p:nvPr>
+        </p:nvSpPr>
+        <p:spPr>
+          <a:xfrm>
+            <a:off x="6231960" y="1604520"/>
+            <a:ext cx="5354280" cy="3977280"/>
+          </a:xfrm>
+          <a:prstGeom prst="rect">
+            <a:avLst/>
+          </a:prstGeom>
+          <a:noFill/>
+          <a:ln w="0">
+            <a:noFill/>
+          </a:ln>
+        </p:spPr>
+        <p:txBody>
+          <a:bodyPr lIns="0" rIns="0" tIns="0" bIns="0" anchor="t">
+            <a:normAutofit/>
+          </a:bodyPr>
+          <a:p>
+            <a:pPr indent="0">
+              <a:spcBef>
+                <a:spcPts val="1417"/>
+              </a:spcBef>
+              <a:buNone/>
+            </a:pPr>
+            <a:endParaRPr b="0" lang="en-US" sz="3200" spc="-1" strike="noStrike">
+              <a:solidFill>
+                <a:srgbClr val="000000"/>
+              </a:solidFill>
+              <a:latin typeface="Calibri"/>
+            </a:endParaRPr>
+          </a:p>
+        </p:txBody>
+      </p:sp>
+      <p:sp>
+        <p:nvSpPr>
+          <p:cNvPr id="58" name="PlaceHolder 4"/>
+          <p:cNvSpPr>
+            <a:spLocks noGrp="1"/>
+          </p:cNvSpPr>
+          <p:nvPr>
+            <p:ph/>
+          </p:nvPr>
+        </p:nvSpPr>
+        <p:spPr>
+          <a:xfrm>
+            <a:off x="609480" y="3682080"/>
+            <a:ext cx="5354280" cy="1896840"/>
+          </a:xfrm>
+          <a:prstGeom prst="rect">
+            <a:avLst/>
+          </a:prstGeom>
+          <a:noFill/>
+          <a:ln w="0">
+            <a:noFill/>
+          </a:ln>
+        </p:spPr>
+        <p:txBody>
+          <a:bodyPr lIns="0" rIns="0" tIns="0" bIns="0" anchor="t">
+            <a:normAutofit/>
+          </a:bodyPr>
+          <a:p>
+            <a:pPr indent="0">
+              <a:spcBef>
+                <a:spcPts val="1417"/>
+              </a:spcBef>
+              <a:buNone/>
+            </a:pPr>
+            <a:endParaRPr b="0" lang="en-US" sz="3200" spc="-1" strike="noStrike">
+              <a:solidFill>
+                <a:srgbClr val="000000"/>
+              </a:solidFill>
+              <a:latin typeface="Calibri"/>
+            </a:endParaRPr>
+          </a:p>
+        </p:txBody>
+      </p:sp>
+      <p:sp>
+        <p:nvSpPr>
+          <p:cNvPr id="6" name="PlaceHolder 5"/>
+          <p:cNvSpPr>
+            <a:spLocks noGrp="1"/>
+          </p:cNvSpPr>
+          <p:nvPr>
+            <p:ph type="ftr" idx="5"/>
+          </p:nvPr>
+        </p:nvSpPr>
+        <p:spPr/>
+        <p:txBody>
+          <a:bodyPr/>
+          <a:p>
+            <a:r>
+              <a:t>Footer</a:t>
+            </a:r>
+          </a:p>
+        </p:txBody>
+      </p:sp>
+      <p:sp>
+        <p:nvSpPr>
+          <p:cNvPr id="7" name="PlaceHolder 6"/>
+          <p:cNvSpPr>
+            <a:spLocks noGrp="1"/>
+          </p:cNvSpPr>
+          <p:nvPr>
+            <p:ph type="sldNum" idx="6"/>
+          </p:nvPr>
+        </p:nvSpPr>
+        <p:spPr/>
+        <p:txBody>
+          <a:bodyPr/>
+          <a:p>
+            <a:fld id="{CBF65BAF-D74E-4753-B2BF-2DDFEEAF14DB}" type="slidenum">
+              <a:t>&lt;#&gt;</a:t>
+            </a:fld>
+          </a:p>
+        </p:txBody>
+      </p:sp>
+      <p:sp>
+        <p:nvSpPr>
+          <p:cNvPr id="8" name="PlaceHolder 7"/>
+          <p:cNvSpPr>
+            <a:spLocks noGrp="1"/>
+          </p:cNvSpPr>
+          <p:nvPr>
+            <p:ph type="dt" idx="4"/>
           </p:nvPr>
         </p:nvSpPr>
         <p:spPr/>
@@ -1031,14 +2150,14 @@
             <a:noAutofit/>
           </a:bodyPr>
           <a:p>
-            <a:pPr indent="0" algn="ctr">
+            <a:pPr indent="0">
               <a:buNone/>
             </a:pPr>
-            <a:endParaRPr b="0" lang="en-US" sz="4400" spc="-1" strike="noStrike">
-              <a:solidFill>
-                <a:srgbClr val="000000"/>
-              </a:solidFill>
-              <a:latin typeface="Arial"/>
+            <a:endParaRPr b="0" lang="en-US" sz="1800" spc="-1" strike="noStrike">
+              <a:solidFill>
+                <a:srgbClr val="000000"/>
+              </a:solidFill>
+              <a:latin typeface="Calibri"/>
             </a:endParaRPr>
           </a:p>
         </p:txBody>
@@ -1117,7 +2236,7 @@
         <p:txBody>
           <a:bodyPr/>
           <a:p>
-            <a:fld id="{921414F5-5CC5-43BD-9326-D41C8C140B06}" type="slidenum">
+            <a:fld id="{1C9091EA-3785-4143-B0CE-EE59291DE640}" type="slidenum">
               <a:t>&lt;#&gt;</a:t>
             </a:fld>
           </a:p>
@@ -1131,6 +2250,1395 @@
           </p:cNvSpPr>
           <p:nvPr>
             <p:ph type="dt" idx="3"/>
+          </p:nvPr>
+        </p:nvSpPr>
+        <p:spPr/>
+        <p:txBody>
+          <a:bodyPr/>
+          <a:p>
+            <a:r>
+              <a:rPr lang="en-US"/>
+              <a:t/>
+            </a:r>
+          </a:p>
+        </p:txBody>
+      </p:sp>
+    </p:spTree>
+  </p:cSld>
+</p:sldLayout>
+</file>
+
+<file path=ppt/slideLayouts/slideLayout20.xml><?xml version="1.0" encoding="utf-8"?>
+<p:sldLayout xmlns:a="http://schemas.openxmlformats.org/drawingml/2006/main" xmlns:p="http://schemas.openxmlformats.org/presentationml/2006/main" xmlns:r="http://schemas.openxmlformats.org/officeDocument/2006/relationships" xmlns:p14="http://schemas.microsoft.com/office/powerpoint/2010/main" xmlns:p15="http://schemas.microsoft.com/office/powerpoint/2012/main" xmlns:mc="http://schemas.openxmlformats.org/markup-compatibility/2006" type="objAndTwoObj" preserve="1">
+  <p:cSld name="Title Content and 2 Content">
+    <p:spTree>
+      <p:nvGrpSpPr>
+        <p:cNvPr id="1" name=""/>
+        <p:cNvGrpSpPr/>
+        <p:nvPr/>
+      </p:nvGrpSpPr>
+      <p:grpSpPr>
+        <a:xfrm>
+          <a:off x="0" y="0"/>
+          <a:ext cx="0" cy="0"/>
+          <a:chOff x="0" y="0"/>
+          <a:chExt cx="0" cy="0"/>
+        </a:xfrm>
+      </p:grpSpPr>
+      <p:sp>
+        <p:nvSpPr>
+          <p:cNvPr id="59" name="PlaceHolder 1"/>
+          <p:cNvSpPr>
+            <a:spLocks noGrp="1"/>
+          </p:cNvSpPr>
+          <p:nvPr>
+            <p:ph type="title"/>
+          </p:nvPr>
+        </p:nvSpPr>
+        <p:spPr>
+          <a:xfrm>
+            <a:off x="609480" y="273600"/>
+            <a:ext cx="10972440" cy="1144800"/>
+          </a:xfrm>
+          <a:prstGeom prst="rect">
+            <a:avLst/>
+          </a:prstGeom>
+          <a:noFill/>
+          <a:ln w="0">
+            <a:noFill/>
+          </a:ln>
+        </p:spPr>
+        <p:txBody>
+          <a:bodyPr lIns="0" rIns="0" tIns="0" bIns="0" anchor="ctr">
+            <a:noAutofit/>
+          </a:bodyPr>
+          <a:p>
+            <a:pPr indent="0">
+              <a:buNone/>
+            </a:pPr>
+            <a:endParaRPr b="0" lang="en-US" sz="1800" spc="-1" strike="noStrike">
+              <a:solidFill>
+                <a:srgbClr val="000000"/>
+              </a:solidFill>
+              <a:latin typeface="Calibri"/>
+            </a:endParaRPr>
+          </a:p>
+        </p:txBody>
+      </p:sp>
+      <p:sp>
+        <p:nvSpPr>
+          <p:cNvPr id="60" name="PlaceHolder 2"/>
+          <p:cNvSpPr>
+            <a:spLocks noGrp="1"/>
+          </p:cNvSpPr>
+          <p:nvPr>
+            <p:ph/>
+          </p:nvPr>
+        </p:nvSpPr>
+        <p:spPr>
+          <a:xfrm>
+            <a:off x="609480" y="1604520"/>
+            <a:ext cx="5354280" cy="3977280"/>
+          </a:xfrm>
+          <a:prstGeom prst="rect">
+            <a:avLst/>
+          </a:prstGeom>
+          <a:noFill/>
+          <a:ln w="0">
+            <a:noFill/>
+          </a:ln>
+        </p:spPr>
+        <p:txBody>
+          <a:bodyPr lIns="0" rIns="0" tIns="0" bIns="0" anchor="t">
+            <a:normAutofit/>
+          </a:bodyPr>
+          <a:p>
+            <a:pPr indent="0">
+              <a:spcBef>
+                <a:spcPts val="1417"/>
+              </a:spcBef>
+              <a:buNone/>
+            </a:pPr>
+            <a:endParaRPr b="0" lang="en-US" sz="3200" spc="-1" strike="noStrike">
+              <a:solidFill>
+                <a:srgbClr val="000000"/>
+              </a:solidFill>
+              <a:latin typeface="Calibri"/>
+            </a:endParaRPr>
+          </a:p>
+        </p:txBody>
+      </p:sp>
+      <p:sp>
+        <p:nvSpPr>
+          <p:cNvPr id="61" name="PlaceHolder 3"/>
+          <p:cNvSpPr>
+            <a:spLocks noGrp="1"/>
+          </p:cNvSpPr>
+          <p:nvPr>
+            <p:ph/>
+          </p:nvPr>
+        </p:nvSpPr>
+        <p:spPr>
+          <a:xfrm>
+            <a:off x="6231960" y="1604520"/>
+            <a:ext cx="5354280" cy="1896840"/>
+          </a:xfrm>
+          <a:prstGeom prst="rect">
+            <a:avLst/>
+          </a:prstGeom>
+          <a:noFill/>
+          <a:ln w="0">
+            <a:noFill/>
+          </a:ln>
+        </p:spPr>
+        <p:txBody>
+          <a:bodyPr lIns="0" rIns="0" tIns="0" bIns="0" anchor="t">
+            <a:normAutofit/>
+          </a:bodyPr>
+          <a:p>
+            <a:pPr indent="0">
+              <a:spcBef>
+                <a:spcPts val="1417"/>
+              </a:spcBef>
+              <a:buNone/>
+            </a:pPr>
+            <a:endParaRPr b="0" lang="en-US" sz="3200" spc="-1" strike="noStrike">
+              <a:solidFill>
+                <a:srgbClr val="000000"/>
+              </a:solidFill>
+              <a:latin typeface="Calibri"/>
+            </a:endParaRPr>
+          </a:p>
+        </p:txBody>
+      </p:sp>
+      <p:sp>
+        <p:nvSpPr>
+          <p:cNvPr id="62" name="PlaceHolder 4"/>
+          <p:cNvSpPr>
+            <a:spLocks noGrp="1"/>
+          </p:cNvSpPr>
+          <p:nvPr>
+            <p:ph/>
+          </p:nvPr>
+        </p:nvSpPr>
+        <p:spPr>
+          <a:xfrm>
+            <a:off x="6231960" y="3682080"/>
+            <a:ext cx="5354280" cy="1896840"/>
+          </a:xfrm>
+          <a:prstGeom prst="rect">
+            <a:avLst/>
+          </a:prstGeom>
+          <a:noFill/>
+          <a:ln w="0">
+            <a:noFill/>
+          </a:ln>
+        </p:spPr>
+        <p:txBody>
+          <a:bodyPr lIns="0" rIns="0" tIns="0" bIns="0" anchor="t">
+            <a:normAutofit/>
+          </a:bodyPr>
+          <a:p>
+            <a:pPr indent="0">
+              <a:spcBef>
+                <a:spcPts val="1417"/>
+              </a:spcBef>
+              <a:buNone/>
+            </a:pPr>
+            <a:endParaRPr b="0" lang="en-US" sz="3200" spc="-1" strike="noStrike">
+              <a:solidFill>
+                <a:srgbClr val="000000"/>
+              </a:solidFill>
+              <a:latin typeface="Calibri"/>
+            </a:endParaRPr>
+          </a:p>
+        </p:txBody>
+      </p:sp>
+      <p:sp>
+        <p:nvSpPr>
+          <p:cNvPr id="6" name="PlaceHolder 5"/>
+          <p:cNvSpPr>
+            <a:spLocks noGrp="1"/>
+          </p:cNvSpPr>
+          <p:nvPr>
+            <p:ph type="ftr" idx="5"/>
+          </p:nvPr>
+        </p:nvSpPr>
+        <p:spPr/>
+        <p:txBody>
+          <a:bodyPr/>
+          <a:p>
+            <a:r>
+              <a:t>Footer</a:t>
+            </a:r>
+          </a:p>
+        </p:txBody>
+      </p:sp>
+      <p:sp>
+        <p:nvSpPr>
+          <p:cNvPr id="7" name="PlaceHolder 6"/>
+          <p:cNvSpPr>
+            <a:spLocks noGrp="1"/>
+          </p:cNvSpPr>
+          <p:nvPr>
+            <p:ph type="sldNum" idx="6"/>
+          </p:nvPr>
+        </p:nvSpPr>
+        <p:spPr/>
+        <p:txBody>
+          <a:bodyPr/>
+          <a:p>
+            <a:fld id="{3E33E0DC-FA38-4DAB-ACE2-244855E1FDBE}" type="slidenum">
+              <a:t>&lt;#&gt;</a:t>
+            </a:fld>
+          </a:p>
+        </p:txBody>
+      </p:sp>
+      <p:sp>
+        <p:nvSpPr>
+          <p:cNvPr id="8" name="PlaceHolder 7"/>
+          <p:cNvSpPr>
+            <a:spLocks noGrp="1"/>
+          </p:cNvSpPr>
+          <p:nvPr>
+            <p:ph type="dt" idx="4"/>
+          </p:nvPr>
+        </p:nvSpPr>
+        <p:spPr/>
+        <p:txBody>
+          <a:bodyPr/>
+          <a:p>
+            <a:r>
+              <a:rPr lang="en-US"/>
+              <a:t/>
+            </a:r>
+          </a:p>
+        </p:txBody>
+      </p:sp>
+    </p:spTree>
+  </p:cSld>
+</p:sldLayout>
+</file>
+
+<file path=ppt/slideLayouts/slideLayout21.xml><?xml version="1.0" encoding="utf-8"?>
+<p:sldLayout xmlns:a="http://schemas.openxmlformats.org/drawingml/2006/main" xmlns:p="http://schemas.openxmlformats.org/presentationml/2006/main" xmlns:r="http://schemas.openxmlformats.org/officeDocument/2006/relationships" xmlns:p14="http://schemas.microsoft.com/office/powerpoint/2010/main" xmlns:p15="http://schemas.microsoft.com/office/powerpoint/2012/main" xmlns:mc="http://schemas.openxmlformats.org/markup-compatibility/2006" type="twoObjOverTx" preserve="1">
+  <p:cSld name="Title, 2 Content over Content">
+    <p:spTree>
+      <p:nvGrpSpPr>
+        <p:cNvPr id="1" name=""/>
+        <p:cNvGrpSpPr/>
+        <p:nvPr/>
+      </p:nvGrpSpPr>
+      <p:grpSpPr>
+        <a:xfrm>
+          <a:off x="0" y="0"/>
+          <a:ext cx="0" cy="0"/>
+          <a:chOff x="0" y="0"/>
+          <a:chExt cx="0" cy="0"/>
+        </a:xfrm>
+      </p:grpSpPr>
+      <p:sp>
+        <p:nvSpPr>
+          <p:cNvPr id="63" name="PlaceHolder 1"/>
+          <p:cNvSpPr>
+            <a:spLocks noGrp="1"/>
+          </p:cNvSpPr>
+          <p:nvPr>
+            <p:ph type="title"/>
+          </p:nvPr>
+        </p:nvSpPr>
+        <p:spPr>
+          <a:xfrm>
+            <a:off x="609480" y="273600"/>
+            <a:ext cx="10972440" cy="1144800"/>
+          </a:xfrm>
+          <a:prstGeom prst="rect">
+            <a:avLst/>
+          </a:prstGeom>
+          <a:noFill/>
+          <a:ln w="0">
+            <a:noFill/>
+          </a:ln>
+        </p:spPr>
+        <p:txBody>
+          <a:bodyPr lIns="0" rIns="0" tIns="0" bIns="0" anchor="ctr">
+            <a:noAutofit/>
+          </a:bodyPr>
+          <a:p>
+            <a:pPr indent="0">
+              <a:buNone/>
+            </a:pPr>
+            <a:endParaRPr b="0" lang="en-US" sz="1800" spc="-1" strike="noStrike">
+              <a:solidFill>
+                <a:srgbClr val="000000"/>
+              </a:solidFill>
+              <a:latin typeface="Calibri"/>
+            </a:endParaRPr>
+          </a:p>
+        </p:txBody>
+      </p:sp>
+      <p:sp>
+        <p:nvSpPr>
+          <p:cNvPr id="64" name="PlaceHolder 2"/>
+          <p:cNvSpPr>
+            <a:spLocks noGrp="1"/>
+          </p:cNvSpPr>
+          <p:nvPr>
+            <p:ph/>
+          </p:nvPr>
+        </p:nvSpPr>
+        <p:spPr>
+          <a:xfrm>
+            <a:off x="609480" y="1604520"/>
+            <a:ext cx="5354280" cy="1896840"/>
+          </a:xfrm>
+          <a:prstGeom prst="rect">
+            <a:avLst/>
+          </a:prstGeom>
+          <a:noFill/>
+          <a:ln w="0">
+            <a:noFill/>
+          </a:ln>
+        </p:spPr>
+        <p:txBody>
+          <a:bodyPr lIns="0" rIns="0" tIns="0" bIns="0" anchor="t">
+            <a:normAutofit/>
+          </a:bodyPr>
+          <a:p>
+            <a:pPr indent="0">
+              <a:spcBef>
+                <a:spcPts val="1417"/>
+              </a:spcBef>
+              <a:buNone/>
+            </a:pPr>
+            <a:endParaRPr b="0" lang="en-US" sz="3200" spc="-1" strike="noStrike">
+              <a:solidFill>
+                <a:srgbClr val="000000"/>
+              </a:solidFill>
+              <a:latin typeface="Calibri"/>
+            </a:endParaRPr>
+          </a:p>
+        </p:txBody>
+      </p:sp>
+      <p:sp>
+        <p:nvSpPr>
+          <p:cNvPr id="65" name="PlaceHolder 3"/>
+          <p:cNvSpPr>
+            <a:spLocks noGrp="1"/>
+          </p:cNvSpPr>
+          <p:nvPr>
+            <p:ph/>
+          </p:nvPr>
+        </p:nvSpPr>
+        <p:spPr>
+          <a:xfrm>
+            <a:off x="6231960" y="1604520"/>
+            <a:ext cx="5354280" cy="1896840"/>
+          </a:xfrm>
+          <a:prstGeom prst="rect">
+            <a:avLst/>
+          </a:prstGeom>
+          <a:noFill/>
+          <a:ln w="0">
+            <a:noFill/>
+          </a:ln>
+        </p:spPr>
+        <p:txBody>
+          <a:bodyPr lIns="0" rIns="0" tIns="0" bIns="0" anchor="t">
+            <a:normAutofit/>
+          </a:bodyPr>
+          <a:p>
+            <a:pPr indent="0">
+              <a:spcBef>
+                <a:spcPts val="1417"/>
+              </a:spcBef>
+              <a:buNone/>
+            </a:pPr>
+            <a:endParaRPr b="0" lang="en-US" sz="3200" spc="-1" strike="noStrike">
+              <a:solidFill>
+                <a:srgbClr val="000000"/>
+              </a:solidFill>
+              <a:latin typeface="Calibri"/>
+            </a:endParaRPr>
+          </a:p>
+        </p:txBody>
+      </p:sp>
+      <p:sp>
+        <p:nvSpPr>
+          <p:cNvPr id="66" name="PlaceHolder 4"/>
+          <p:cNvSpPr>
+            <a:spLocks noGrp="1"/>
+          </p:cNvSpPr>
+          <p:nvPr>
+            <p:ph/>
+          </p:nvPr>
+        </p:nvSpPr>
+        <p:spPr>
+          <a:xfrm>
+            <a:off x="609480" y="3682080"/>
+            <a:ext cx="10972440" cy="1896840"/>
+          </a:xfrm>
+          <a:prstGeom prst="rect">
+            <a:avLst/>
+          </a:prstGeom>
+          <a:noFill/>
+          <a:ln w="0">
+            <a:noFill/>
+          </a:ln>
+        </p:spPr>
+        <p:txBody>
+          <a:bodyPr lIns="0" rIns="0" tIns="0" bIns="0" anchor="t">
+            <a:normAutofit/>
+          </a:bodyPr>
+          <a:p>
+            <a:pPr indent="0">
+              <a:spcBef>
+                <a:spcPts val="1417"/>
+              </a:spcBef>
+              <a:buNone/>
+            </a:pPr>
+            <a:endParaRPr b="0" lang="en-US" sz="3200" spc="-1" strike="noStrike">
+              <a:solidFill>
+                <a:srgbClr val="000000"/>
+              </a:solidFill>
+              <a:latin typeface="Calibri"/>
+            </a:endParaRPr>
+          </a:p>
+        </p:txBody>
+      </p:sp>
+      <p:sp>
+        <p:nvSpPr>
+          <p:cNvPr id="6" name="PlaceHolder 5"/>
+          <p:cNvSpPr>
+            <a:spLocks noGrp="1"/>
+          </p:cNvSpPr>
+          <p:nvPr>
+            <p:ph type="ftr" idx="5"/>
+          </p:nvPr>
+        </p:nvSpPr>
+        <p:spPr/>
+        <p:txBody>
+          <a:bodyPr/>
+          <a:p>
+            <a:r>
+              <a:t>Footer</a:t>
+            </a:r>
+          </a:p>
+        </p:txBody>
+      </p:sp>
+      <p:sp>
+        <p:nvSpPr>
+          <p:cNvPr id="7" name="PlaceHolder 6"/>
+          <p:cNvSpPr>
+            <a:spLocks noGrp="1"/>
+          </p:cNvSpPr>
+          <p:nvPr>
+            <p:ph type="sldNum" idx="6"/>
+          </p:nvPr>
+        </p:nvSpPr>
+        <p:spPr/>
+        <p:txBody>
+          <a:bodyPr/>
+          <a:p>
+            <a:fld id="{F706199F-C7A4-42D3-9C91-D8607E4BA96E}" type="slidenum">
+              <a:t>&lt;#&gt;</a:t>
+            </a:fld>
+          </a:p>
+        </p:txBody>
+      </p:sp>
+      <p:sp>
+        <p:nvSpPr>
+          <p:cNvPr id="8" name="PlaceHolder 7"/>
+          <p:cNvSpPr>
+            <a:spLocks noGrp="1"/>
+          </p:cNvSpPr>
+          <p:nvPr>
+            <p:ph type="dt" idx="4"/>
+          </p:nvPr>
+        </p:nvSpPr>
+        <p:spPr/>
+        <p:txBody>
+          <a:bodyPr/>
+          <a:p>
+            <a:r>
+              <a:rPr lang="en-US"/>
+              <a:t/>
+            </a:r>
+          </a:p>
+        </p:txBody>
+      </p:sp>
+    </p:spTree>
+  </p:cSld>
+</p:sldLayout>
+</file>
+
+<file path=ppt/slideLayouts/slideLayout22.xml><?xml version="1.0" encoding="utf-8"?>
+<p:sldLayout xmlns:a="http://schemas.openxmlformats.org/drawingml/2006/main" xmlns:p="http://schemas.openxmlformats.org/presentationml/2006/main" xmlns:r="http://schemas.openxmlformats.org/officeDocument/2006/relationships" xmlns:p14="http://schemas.microsoft.com/office/powerpoint/2010/main" xmlns:p15="http://schemas.microsoft.com/office/powerpoint/2012/main" xmlns:mc="http://schemas.openxmlformats.org/markup-compatibility/2006" type="objOverTx" preserve="1">
+  <p:cSld name="Title, Content over Content">
+    <p:spTree>
+      <p:nvGrpSpPr>
+        <p:cNvPr id="1" name=""/>
+        <p:cNvGrpSpPr/>
+        <p:nvPr/>
+      </p:nvGrpSpPr>
+      <p:grpSpPr>
+        <a:xfrm>
+          <a:off x="0" y="0"/>
+          <a:ext cx="0" cy="0"/>
+          <a:chOff x="0" y="0"/>
+          <a:chExt cx="0" cy="0"/>
+        </a:xfrm>
+      </p:grpSpPr>
+      <p:sp>
+        <p:nvSpPr>
+          <p:cNvPr id="67" name="PlaceHolder 1"/>
+          <p:cNvSpPr>
+            <a:spLocks noGrp="1"/>
+          </p:cNvSpPr>
+          <p:nvPr>
+            <p:ph type="title"/>
+          </p:nvPr>
+        </p:nvSpPr>
+        <p:spPr>
+          <a:xfrm>
+            <a:off x="609480" y="273600"/>
+            <a:ext cx="10972440" cy="1144800"/>
+          </a:xfrm>
+          <a:prstGeom prst="rect">
+            <a:avLst/>
+          </a:prstGeom>
+          <a:noFill/>
+          <a:ln w="0">
+            <a:noFill/>
+          </a:ln>
+        </p:spPr>
+        <p:txBody>
+          <a:bodyPr lIns="0" rIns="0" tIns="0" bIns="0" anchor="ctr">
+            <a:noAutofit/>
+          </a:bodyPr>
+          <a:p>
+            <a:pPr indent="0">
+              <a:buNone/>
+            </a:pPr>
+            <a:endParaRPr b="0" lang="en-US" sz="1800" spc="-1" strike="noStrike">
+              <a:solidFill>
+                <a:srgbClr val="000000"/>
+              </a:solidFill>
+              <a:latin typeface="Calibri"/>
+            </a:endParaRPr>
+          </a:p>
+        </p:txBody>
+      </p:sp>
+      <p:sp>
+        <p:nvSpPr>
+          <p:cNvPr id="68" name="PlaceHolder 2"/>
+          <p:cNvSpPr>
+            <a:spLocks noGrp="1"/>
+          </p:cNvSpPr>
+          <p:nvPr>
+            <p:ph/>
+          </p:nvPr>
+        </p:nvSpPr>
+        <p:spPr>
+          <a:xfrm>
+            <a:off x="609480" y="1604520"/>
+            <a:ext cx="10972440" cy="1896840"/>
+          </a:xfrm>
+          <a:prstGeom prst="rect">
+            <a:avLst/>
+          </a:prstGeom>
+          <a:noFill/>
+          <a:ln w="0">
+            <a:noFill/>
+          </a:ln>
+        </p:spPr>
+        <p:txBody>
+          <a:bodyPr lIns="0" rIns="0" tIns="0" bIns="0" anchor="t">
+            <a:normAutofit/>
+          </a:bodyPr>
+          <a:p>
+            <a:pPr indent="0">
+              <a:spcBef>
+                <a:spcPts val="1417"/>
+              </a:spcBef>
+              <a:buNone/>
+            </a:pPr>
+            <a:endParaRPr b="0" lang="en-US" sz="3200" spc="-1" strike="noStrike">
+              <a:solidFill>
+                <a:srgbClr val="000000"/>
+              </a:solidFill>
+              <a:latin typeface="Calibri"/>
+            </a:endParaRPr>
+          </a:p>
+        </p:txBody>
+      </p:sp>
+      <p:sp>
+        <p:nvSpPr>
+          <p:cNvPr id="69" name="PlaceHolder 3"/>
+          <p:cNvSpPr>
+            <a:spLocks noGrp="1"/>
+          </p:cNvSpPr>
+          <p:nvPr>
+            <p:ph/>
+          </p:nvPr>
+        </p:nvSpPr>
+        <p:spPr>
+          <a:xfrm>
+            <a:off x="609480" y="3682080"/>
+            <a:ext cx="10972440" cy="1896840"/>
+          </a:xfrm>
+          <a:prstGeom prst="rect">
+            <a:avLst/>
+          </a:prstGeom>
+          <a:noFill/>
+          <a:ln w="0">
+            <a:noFill/>
+          </a:ln>
+        </p:spPr>
+        <p:txBody>
+          <a:bodyPr lIns="0" rIns="0" tIns="0" bIns="0" anchor="t">
+            <a:normAutofit/>
+          </a:bodyPr>
+          <a:p>
+            <a:pPr indent="0">
+              <a:spcBef>
+                <a:spcPts val="1417"/>
+              </a:spcBef>
+              <a:buNone/>
+            </a:pPr>
+            <a:endParaRPr b="0" lang="en-US" sz="3200" spc="-1" strike="noStrike">
+              <a:solidFill>
+                <a:srgbClr val="000000"/>
+              </a:solidFill>
+              <a:latin typeface="Calibri"/>
+            </a:endParaRPr>
+          </a:p>
+        </p:txBody>
+      </p:sp>
+      <p:sp>
+        <p:nvSpPr>
+          <p:cNvPr id="5" name="PlaceHolder 4"/>
+          <p:cNvSpPr>
+            <a:spLocks noGrp="1"/>
+          </p:cNvSpPr>
+          <p:nvPr>
+            <p:ph type="ftr" idx="5"/>
+          </p:nvPr>
+        </p:nvSpPr>
+        <p:spPr/>
+        <p:txBody>
+          <a:bodyPr/>
+          <a:p>
+            <a:r>
+              <a:t>Footer</a:t>
+            </a:r>
+          </a:p>
+        </p:txBody>
+      </p:sp>
+      <p:sp>
+        <p:nvSpPr>
+          <p:cNvPr id="6" name="PlaceHolder 5"/>
+          <p:cNvSpPr>
+            <a:spLocks noGrp="1"/>
+          </p:cNvSpPr>
+          <p:nvPr>
+            <p:ph type="sldNum" idx="6"/>
+          </p:nvPr>
+        </p:nvSpPr>
+        <p:spPr/>
+        <p:txBody>
+          <a:bodyPr/>
+          <a:p>
+            <a:fld id="{BF53A81D-358B-48C0-B682-3C59E8AA539F}" type="slidenum">
+              <a:t>&lt;#&gt;</a:t>
+            </a:fld>
+          </a:p>
+        </p:txBody>
+      </p:sp>
+      <p:sp>
+        <p:nvSpPr>
+          <p:cNvPr id="7" name="PlaceHolder 6"/>
+          <p:cNvSpPr>
+            <a:spLocks noGrp="1"/>
+          </p:cNvSpPr>
+          <p:nvPr>
+            <p:ph type="dt" idx="4"/>
+          </p:nvPr>
+        </p:nvSpPr>
+        <p:spPr/>
+        <p:txBody>
+          <a:bodyPr/>
+          <a:p>
+            <a:r>
+              <a:rPr lang="en-US"/>
+              <a:t/>
+            </a:r>
+          </a:p>
+        </p:txBody>
+      </p:sp>
+    </p:spTree>
+  </p:cSld>
+</p:sldLayout>
+</file>
+
+<file path=ppt/slideLayouts/slideLayout23.xml><?xml version="1.0" encoding="utf-8"?>
+<p:sldLayout xmlns:a="http://schemas.openxmlformats.org/drawingml/2006/main" xmlns:p="http://schemas.openxmlformats.org/presentationml/2006/main" xmlns:r="http://schemas.openxmlformats.org/officeDocument/2006/relationships" xmlns:p14="http://schemas.microsoft.com/office/powerpoint/2010/main" xmlns:p15="http://schemas.microsoft.com/office/powerpoint/2012/main" xmlns:mc="http://schemas.openxmlformats.org/markup-compatibility/2006" type="fourObj" preserve="1">
+  <p:cSld name="Title, 4 Content">
+    <p:spTree>
+      <p:nvGrpSpPr>
+        <p:cNvPr id="1" name=""/>
+        <p:cNvGrpSpPr/>
+        <p:nvPr/>
+      </p:nvGrpSpPr>
+      <p:grpSpPr>
+        <a:xfrm>
+          <a:off x="0" y="0"/>
+          <a:ext cx="0" cy="0"/>
+          <a:chOff x="0" y="0"/>
+          <a:chExt cx="0" cy="0"/>
+        </a:xfrm>
+      </p:grpSpPr>
+      <p:sp>
+        <p:nvSpPr>
+          <p:cNvPr id="70" name="PlaceHolder 1"/>
+          <p:cNvSpPr>
+            <a:spLocks noGrp="1"/>
+          </p:cNvSpPr>
+          <p:nvPr>
+            <p:ph type="title"/>
+          </p:nvPr>
+        </p:nvSpPr>
+        <p:spPr>
+          <a:xfrm>
+            <a:off x="609480" y="273600"/>
+            <a:ext cx="10972440" cy="1144800"/>
+          </a:xfrm>
+          <a:prstGeom prst="rect">
+            <a:avLst/>
+          </a:prstGeom>
+          <a:noFill/>
+          <a:ln w="0">
+            <a:noFill/>
+          </a:ln>
+        </p:spPr>
+        <p:txBody>
+          <a:bodyPr lIns="0" rIns="0" tIns="0" bIns="0" anchor="ctr">
+            <a:noAutofit/>
+          </a:bodyPr>
+          <a:p>
+            <a:pPr indent="0">
+              <a:buNone/>
+            </a:pPr>
+            <a:endParaRPr b="0" lang="en-US" sz="1800" spc="-1" strike="noStrike">
+              <a:solidFill>
+                <a:srgbClr val="000000"/>
+              </a:solidFill>
+              <a:latin typeface="Calibri"/>
+            </a:endParaRPr>
+          </a:p>
+        </p:txBody>
+      </p:sp>
+      <p:sp>
+        <p:nvSpPr>
+          <p:cNvPr id="71" name="PlaceHolder 2"/>
+          <p:cNvSpPr>
+            <a:spLocks noGrp="1"/>
+          </p:cNvSpPr>
+          <p:nvPr>
+            <p:ph/>
+          </p:nvPr>
+        </p:nvSpPr>
+        <p:spPr>
+          <a:xfrm>
+            <a:off x="609480" y="1604520"/>
+            <a:ext cx="5354280" cy="1896840"/>
+          </a:xfrm>
+          <a:prstGeom prst="rect">
+            <a:avLst/>
+          </a:prstGeom>
+          <a:noFill/>
+          <a:ln w="0">
+            <a:noFill/>
+          </a:ln>
+        </p:spPr>
+        <p:txBody>
+          <a:bodyPr lIns="0" rIns="0" tIns="0" bIns="0" anchor="t">
+            <a:normAutofit/>
+          </a:bodyPr>
+          <a:p>
+            <a:pPr indent="0">
+              <a:spcBef>
+                <a:spcPts val="1417"/>
+              </a:spcBef>
+              <a:buNone/>
+            </a:pPr>
+            <a:endParaRPr b="0" lang="en-US" sz="3200" spc="-1" strike="noStrike">
+              <a:solidFill>
+                <a:srgbClr val="000000"/>
+              </a:solidFill>
+              <a:latin typeface="Calibri"/>
+            </a:endParaRPr>
+          </a:p>
+        </p:txBody>
+      </p:sp>
+      <p:sp>
+        <p:nvSpPr>
+          <p:cNvPr id="72" name="PlaceHolder 3"/>
+          <p:cNvSpPr>
+            <a:spLocks noGrp="1"/>
+          </p:cNvSpPr>
+          <p:nvPr>
+            <p:ph/>
+          </p:nvPr>
+        </p:nvSpPr>
+        <p:spPr>
+          <a:xfrm>
+            <a:off x="6231960" y="1604520"/>
+            <a:ext cx="5354280" cy="1896840"/>
+          </a:xfrm>
+          <a:prstGeom prst="rect">
+            <a:avLst/>
+          </a:prstGeom>
+          <a:noFill/>
+          <a:ln w="0">
+            <a:noFill/>
+          </a:ln>
+        </p:spPr>
+        <p:txBody>
+          <a:bodyPr lIns="0" rIns="0" tIns="0" bIns="0" anchor="t">
+            <a:normAutofit/>
+          </a:bodyPr>
+          <a:p>
+            <a:pPr indent="0">
+              <a:spcBef>
+                <a:spcPts val="1417"/>
+              </a:spcBef>
+              <a:buNone/>
+            </a:pPr>
+            <a:endParaRPr b="0" lang="en-US" sz="3200" spc="-1" strike="noStrike">
+              <a:solidFill>
+                <a:srgbClr val="000000"/>
+              </a:solidFill>
+              <a:latin typeface="Calibri"/>
+            </a:endParaRPr>
+          </a:p>
+        </p:txBody>
+      </p:sp>
+      <p:sp>
+        <p:nvSpPr>
+          <p:cNvPr id="73" name="PlaceHolder 4"/>
+          <p:cNvSpPr>
+            <a:spLocks noGrp="1"/>
+          </p:cNvSpPr>
+          <p:nvPr>
+            <p:ph/>
+          </p:nvPr>
+        </p:nvSpPr>
+        <p:spPr>
+          <a:xfrm>
+            <a:off x="609480" y="3682080"/>
+            <a:ext cx="5354280" cy="1896840"/>
+          </a:xfrm>
+          <a:prstGeom prst="rect">
+            <a:avLst/>
+          </a:prstGeom>
+          <a:noFill/>
+          <a:ln w="0">
+            <a:noFill/>
+          </a:ln>
+        </p:spPr>
+        <p:txBody>
+          <a:bodyPr lIns="0" rIns="0" tIns="0" bIns="0" anchor="t">
+            <a:normAutofit/>
+          </a:bodyPr>
+          <a:p>
+            <a:pPr indent="0">
+              <a:spcBef>
+                <a:spcPts val="1417"/>
+              </a:spcBef>
+              <a:buNone/>
+            </a:pPr>
+            <a:endParaRPr b="0" lang="en-US" sz="3200" spc="-1" strike="noStrike">
+              <a:solidFill>
+                <a:srgbClr val="000000"/>
+              </a:solidFill>
+              <a:latin typeface="Calibri"/>
+            </a:endParaRPr>
+          </a:p>
+        </p:txBody>
+      </p:sp>
+      <p:sp>
+        <p:nvSpPr>
+          <p:cNvPr id="74" name="PlaceHolder 5"/>
+          <p:cNvSpPr>
+            <a:spLocks noGrp="1"/>
+          </p:cNvSpPr>
+          <p:nvPr>
+            <p:ph/>
+          </p:nvPr>
+        </p:nvSpPr>
+        <p:spPr>
+          <a:xfrm>
+            <a:off x="6231960" y="3682080"/>
+            <a:ext cx="5354280" cy="1896840"/>
+          </a:xfrm>
+          <a:prstGeom prst="rect">
+            <a:avLst/>
+          </a:prstGeom>
+          <a:noFill/>
+          <a:ln w="0">
+            <a:noFill/>
+          </a:ln>
+        </p:spPr>
+        <p:txBody>
+          <a:bodyPr lIns="0" rIns="0" tIns="0" bIns="0" anchor="t">
+            <a:normAutofit/>
+          </a:bodyPr>
+          <a:p>
+            <a:pPr indent="0">
+              <a:spcBef>
+                <a:spcPts val="1417"/>
+              </a:spcBef>
+              <a:buNone/>
+            </a:pPr>
+            <a:endParaRPr b="0" lang="en-US" sz="3200" spc="-1" strike="noStrike">
+              <a:solidFill>
+                <a:srgbClr val="000000"/>
+              </a:solidFill>
+              <a:latin typeface="Calibri"/>
+            </a:endParaRPr>
+          </a:p>
+        </p:txBody>
+      </p:sp>
+      <p:sp>
+        <p:nvSpPr>
+          <p:cNvPr id="7" name="PlaceHolder 6"/>
+          <p:cNvSpPr>
+            <a:spLocks noGrp="1"/>
+          </p:cNvSpPr>
+          <p:nvPr>
+            <p:ph type="ftr" idx="5"/>
+          </p:nvPr>
+        </p:nvSpPr>
+        <p:spPr/>
+        <p:txBody>
+          <a:bodyPr/>
+          <a:p>
+            <a:r>
+              <a:t>Footer</a:t>
+            </a:r>
+          </a:p>
+        </p:txBody>
+      </p:sp>
+      <p:sp>
+        <p:nvSpPr>
+          <p:cNvPr id="8" name="PlaceHolder 7"/>
+          <p:cNvSpPr>
+            <a:spLocks noGrp="1"/>
+          </p:cNvSpPr>
+          <p:nvPr>
+            <p:ph type="sldNum" idx="6"/>
+          </p:nvPr>
+        </p:nvSpPr>
+        <p:spPr/>
+        <p:txBody>
+          <a:bodyPr/>
+          <a:p>
+            <a:fld id="{86C4578C-47F7-4C75-BBB6-B1932F434C36}" type="slidenum">
+              <a:t>&lt;#&gt;</a:t>
+            </a:fld>
+          </a:p>
+        </p:txBody>
+      </p:sp>
+      <p:sp>
+        <p:nvSpPr>
+          <p:cNvPr id="9" name="PlaceHolder 8"/>
+          <p:cNvSpPr>
+            <a:spLocks noGrp="1"/>
+          </p:cNvSpPr>
+          <p:nvPr>
+            <p:ph type="dt" idx="4"/>
+          </p:nvPr>
+        </p:nvSpPr>
+        <p:spPr/>
+        <p:txBody>
+          <a:bodyPr/>
+          <a:p>
+            <a:r>
+              <a:rPr lang="en-US"/>
+              <a:t/>
+            </a:r>
+          </a:p>
+        </p:txBody>
+      </p:sp>
+    </p:spTree>
+  </p:cSld>
+</p:sldLayout>
+</file>
+
+<file path=ppt/slideLayouts/slideLayout24.xml><?xml version="1.0" encoding="utf-8"?>
+<p:sldLayout xmlns:a="http://schemas.openxmlformats.org/drawingml/2006/main" xmlns:p="http://schemas.openxmlformats.org/presentationml/2006/main" xmlns:r="http://schemas.openxmlformats.org/officeDocument/2006/relationships" xmlns:p14="http://schemas.microsoft.com/office/powerpoint/2010/main" xmlns:p15="http://schemas.microsoft.com/office/powerpoint/2012/main" xmlns:mc="http://schemas.openxmlformats.org/markup-compatibility/2006" type="blank" preserve="1">
+  <p:cSld name="Title, 6 Content">
+    <p:spTree>
+      <p:nvGrpSpPr>
+        <p:cNvPr id="1" name=""/>
+        <p:cNvGrpSpPr/>
+        <p:nvPr/>
+      </p:nvGrpSpPr>
+      <p:grpSpPr>
+        <a:xfrm>
+          <a:off x="0" y="0"/>
+          <a:ext cx="0" cy="0"/>
+          <a:chOff x="0" y="0"/>
+          <a:chExt cx="0" cy="0"/>
+        </a:xfrm>
+      </p:grpSpPr>
+      <p:sp>
+        <p:nvSpPr>
+          <p:cNvPr id="75" name="PlaceHolder 1"/>
+          <p:cNvSpPr>
+            <a:spLocks noGrp="1"/>
+          </p:cNvSpPr>
+          <p:nvPr>
+            <p:ph type="title"/>
+          </p:nvPr>
+        </p:nvSpPr>
+        <p:spPr>
+          <a:xfrm>
+            <a:off x="609480" y="273600"/>
+            <a:ext cx="10972440" cy="1144800"/>
+          </a:xfrm>
+          <a:prstGeom prst="rect">
+            <a:avLst/>
+          </a:prstGeom>
+          <a:noFill/>
+          <a:ln w="0">
+            <a:noFill/>
+          </a:ln>
+        </p:spPr>
+        <p:txBody>
+          <a:bodyPr lIns="0" rIns="0" tIns="0" bIns="0" anchor="ctr">
+            <a:noAutofit/>
+          </a:bodyPr>
+          <a:p>
+            <a:pPr indent="0">
+              <a:buNone/>
+            </a:pPr>
+            <a:endParaRPr b="0" lang="en-US" sz="1800" spc="-1" strike="noStrike">
+              <a:solidFill>
+                <a:srgbClr val="000000"/>
+              </a:solidFill>
+              <a:latin typeface="Calibri"/>
+            </a:endParaRPr>
+          </a:p>
+        </p:txBody>
+      </p:sp>
+      <p:sp>
+        <p:nvSpPr>
+          <p:cNvPr id="76" name="PlaceHolder 2"/>
+          <p:cNvSpPr>
+            <a:spLocks noGrp="1"/>
+          </p:cNvSpPr>
+          <p:nvPr>
+            <p:ph/>
+          </p:nvPr>
+        </p:nvSpPr>
+        <p:spPr>
+          <a:xfrm>
+            <a:off x="609480" y="1604520"/>
+            <a:ext cx="3533040" cy="1896840"/>
+          </a:xfrm>
+          <a:prstGeom prst="rect">
+            <a:avLst/>
+          </a:prstGeom>
+          <a:noFill/>
+          <a:ln w="0">
+            <a:noFill/>
+          </a:ln>
+        </p:spPr>
+        <p:txBody>
+          <a:bodyPr lIns="0" rIns="0" tIns="0" bIns="0" anchor="t">
+            <a:normAutofit/>
+          </a:bodyPr>
+          <a:p>
+            <a:pPr indent="0">
+              <a:spcBef>
+                <a:spcPts val="1417"/>
+              </a:spcBef>
+              <a:buNone/>
+            </a:pPr>
+            <a:endParaRPr b="0" lang="en-US" sz="3200" spc="-1" strike="noStrike">
+              <a:solidFill>
+                <a:srgbClr val="000000"/>
+              </a:solidFill>
+              <a:latin typeface="Calibri"/>
+            </a:endParaRPr>
+          </a:p>
+        </p:txBody>
+      </p:sp>
+      <p:sp>
+        <p:nvSpPr>
+          <p:cNvPr id="77" name="PlaceHolder 3"/>
+          <p:cNvSpPr>
+            <a:spLocks noGrp="1"/>
+          </p:cNvSpPr>
+          <p:nvPr>
+            <p:ph/>
+          </p:nvPr>
+        </p:nvSpPr>
+        <p:spPr>
+          <a:xfrm>
+            <a:off x="4319640" y="1604520"/>
+            <a:ext cx="3533040" cy="1896840"/>
+          </a:xfrm>
+          <a:prstGeom prst="rect">
+            <a:avLst/>
+          </a:prstGeom>
+          <a:noFill/>
+          <a:ln w="0">
+            <a:noFill/>
+          </a:ln>
+        </p:spPr>
+        <p:txBody>
+          <a:bodyPr lIns="0" rIns="0" tIns="0" bIns="0" anchor="t">
+            <a:normAutofit/>
+          </a:bodyPr>
+          <a:p>
+            <a:pPr indent="0">
+              <a:spcBef>
+                <a:spcPts val="1417"/>
+              </a:spcBef>
+              <a:buNone/>
+            </a:pPr>
+            <a:endParaRPr b="0" lang="en-US" sz="3200" spc="-1" strike="noStrike">
+              <a:solidFill>
+                <a:srgbClr val="000000"/>
+              </a:solidFill>
+              <a:latin typeface="Calibri"/>
+            </a:endParaRPr>
+          </a:p>
+        </p:txBody>
+      </p:sp>
+      <p:sp>
+        <p:nvSpPr>
+          <p:cNvPr id="78" name="PlaceHolder 4"/>
+          <p:cNvSpPr>
+            <a:spLocks noGrp="1"/>
+          </p:cNvSpPr>
+          <p:nvPr>
+            <p:ph/>
+          </p:nvPr>
+        </p:nvSpPr>
+        <p:spPr>
+          <a:xfrm>
+            <a:off x="8029800" y="1604520"/>
+            <a:ext cx="3533040" cy="1896840"/>
+          </a:xfrm>
+          <a:prstGeom prst="rect">
+            <a:avLst/>
+          </a:prstGeom>
+          <a:noFill/>
+          <a:ln w="0">
+            <a:noFill/>
+          </a:ln>
+        </p:spPr>
+        <p:txBody>
+          <a:bodyPr lIns="0" rIns="0" tIns="0" bIns="0" anchor="t">
+            <a:normAutofit/>
+          </a:bodyPr>
+          <a:p>
+            <a:pPr indent="0">
+              <a:spcBef>
+                <a:spcPts val="1417"/>
+              </a:spcBef>
+              <a:buNone/>
+            </a:pPr>
+            <a:endParaRPr b="0" lang="en-US" sz="3200" spc="-1" strike="noStrike">
+              <a:solidFill>
+                <a:srgbClr val="000000"/>
+              </a:solidFill>
+              <a:latin typeface="Calibri"/>
+            </a:endParaRPr>
+          </a:p>
+        </p:txBody>
+      </p:sp>
+      <p:sp>
+        <p:nvSpPr>
+          <p:cNvPr id="79" name="PlaceHolder 5"/>
+          <p:cNvSpPr>
+            <a:spLocks noGrp="1"/>
+          </p:cNvSpPr>
+          <p:nvPr>
+            <p:ph/>
+          </p:nvPr>
+        </p:nvSpPr>
+        <p:spPr>
+          <a:xfrm>
+            <a:off x="609480" y="3682080"/>
+            <a:ext cx="3533040" cy="1896840"/>
+          </a:xfrm>
+          <a:prstGeom prst="rect">
+            <a:avLst/>
+          </a:prstGeom>
+          <a:noFill/>
+          <a:ln w="0">
+            <a:noFill/>
+          </a:ln>
+        </p:spPr>
+        <p:txBody>
+          <a:bodyPr lIns="0" rIns="0" tIns="0" bIns="0" anchor="t">
+            <a:normAutofit/>
+          </a:bodyPr>
+          <a:p>
+            <a:pPr indent="0">
+              <a:spcBef>
+                <a:spcPts val="1417"/>
+              </a:spcBef>
+              <a:buNone/>
+            </a:pPr>
+            <a:endParaRPr b="0" lang="en-US" sz="3200" spc="-1" strike="noStrike">
+              <a:solidFill>
+                <a:srgbClr val="000000"/>
+              </a:solidFill>
+              <a:latin typeface="Calibri"/>
+            </a:endParaRPr>
+          </a:p>
+        </p:txBody>
+      </p:sp>
+      <p:sp>
+        <p:nvSpPr>
+          <p:cNvPr id="80" name="PlaceHolder 6"/>
+          <p:cNvSpPr>
+            <a:spLocks noGrp="1"/>
+          </p:cNvSpPr>
+          <p:nvPr>
+            <p:ph/>
+          </p:nvPr>
+        </p:nvSpPr>
+        <p:spPr>
+          <a:xfrm>
+            <a:off x="4319640" y="3682080"/>
+            <a:ext cx="3533040" cy="1896840"/>
+          </a:xfrm>
+          <a:prstGeom prst="rect">
+            <a:avLst/>
+          </a:prstGeom>
+          <a:noFill/>
+          <a:ln w="0">
+            <a:noFill/>
+          </a:ln>
+        </p:spPr>
+        <p:txBody>
+          <a:bodyPr lIns="0" rIns="0" tIns="0" bIns="0" anchor="t">
+            <a:normAutofit/>
+          </a:bodyPr>
+          <a:p>
+            <a:pPr indent="0">
+              <a:spcBef>
+                <a:spcPts val="1417"/>
+              </a:spcBef>
+              <a:buNone/>
+            </a:pPr>
+            <a:endParaRPr b="0" lang="en-US" sz="3200" spc="-1" strike="noStrike">
+              <a:solidFill>
+                <a:srgbClr val="000000"/>
+              </a:solidFill>
+              <a:latin typeface="Calibri"/>
+            </a:endParaRPr>
+          </a:p>
+        </p:txBody>
+      </p:sp>
+      <p:sp>
+        <p:nvSpPr>
+          <p:cNvPr id="81" name="PlaceHolder 7"/>
+          <p:cNvSpPr>
+            <a:spLocks noGrp="1"/>
+          </p:cNvSpPr>
+          <p:nvPr>
+            <p:ph/>
+          </p:nvPr>
+        </p:nvSpPr>
+        <p:spPr>
+          <a:xfrm>
+            <a:off x="8029800" y="3682080"/>
+            <a:ext cx="3533040" cy="1896840"/>
+          </a:xfrm>
+          <a:prstGeom prst="rect">
+            <a:avLst/>
+          </a:prstGeom>
+          <a:noFill/>
+          <a:ln w="0">
+            <a:noFill/>
+          </a:ln>
+        </p:spPr>
+        <p:txBody>
+          <a:bodyPr lIns="0" rIns="0" tIns="0" bIns="0" anchor="t">
+            <a:normAutofit/>
+          </a:bodyPr>
+          <a:p>
+            <a:pPr indent="0">
+              <a:spcBef>
+                <a:spcPts val="1417"/>
+              </a:spcBef>
+              <a:buNone/>
+            </a:pPr>
+            <a:endParaRPr b="0" lang="en-US" sz="3200" spc="-1" strike="noStrike">
+              <a:solidFill>
+                <a:srgbClr val="000000"/>
+              </a:solidFill>
+              <a:latin typeface="Calibri"/>
+            </a:endParaRPr>
+          </a:p>
+        </p:txBody>
+      </p:sp>
+      <p:sp>
+        <p:nvSpPr>
+          <p:cNvPr id="9" name="PlaceHolder 8"/>
+          <p:cNvSpPr>
+            <a:spLocks noGrp="1"/>
+          </p:cNvSpPr>
+          <p:nvPr>
+            <p:ph type="ftr" idx="5"/>
+          </p:nvPr>
+        </p:nvSpPr>
+        <p:spPr/>
+        <p:txBody>
+          <a:bodyPr/>
+          <a:p>
+            <a:r>
+              <a:t>Footer</a:t>
+            </a:r>
+          </a:p>
+        </p:txBody>
+      </p:sp>
+      <p:sp>
+        <p:nvSpPr>
+          <p:cNvPr id="10" name="PlaceHolder 9"/>
+          <p:cNvSpPr>
+            <a:spLocks noGrp="1"/>
+          </p:cNvSpPr>
+          <p:nvPr>
+            <p:ph type="sldNum" idx="6"/>
+          </p:nvPr>
+        </p:nvSpPr>
+        <p:spPr/>
+        <p:txBody>
+          <a:bodyPr/>
+          <a:p>
+            <a:fld id="{470B16BA-1893-475A-8253-2E1F5111D866}" type="slidenum">
+              <a:t>&lt;#&gt;</a:t>
+            </a:fld>
+          </a:p>
+        </p:txBody>
+      </p:sp>
+      <p:sp>
+        <p:nvSpPr>
+          <p:cNvPr id="11" name="PlaceHolder 10"/>
+          <p:cNvSpPr>
+            <a:spLocks noGrp="1"/>
+          </p:cNvSpPr>
+          <p:nvPr>
+            <p:ph type="dt" idx="4"/>
           </p:nvPr>
         </p:nvSpPr>
         <p:spPr/>
@@ -1194,14 +3702,14 @@
             <a:noAutofit/>
           </a:bodyPr>
           <a:p>
-            <a:pPr indent="0" algn="ctr">
+            <a:pPr indent="0">
               <a:buNone/>
             </a:pPr>
-            <a:endParaRPr b="0" lang="en-US" sz="4400" spc="-1" strike="noStrike">
-              <a:solidFill>
-                <a:srgbClr val="000000"/>
-              </a:solidFill>
-              <a:latin typeface="Arial"/>
+            <a:endParaRPr b="0" lang="en-US" sz="1800" spc="-1" strike="noStrike">
+              <a:solidFill>
+                <a:srgbClr val="000000"/>
+              </a:solidFill>
+              <a:latin typeface="Calibri"/>
             </a:endParaRPr>
           </a:p>
         </p:txBody>
@@ -1244,7 +3752,7 @@
               <a:solidFill>
                 <a:srgbClr val="000000"/>
               </a:solidFill>
-              <a:latin typeface="Arial"/>
+              <a:latin typeface="Calibri"/>
             </a:endParaRPr>
           </a:p>
         </p:txBody>
@@ -1283,7 +3791,7 @@
         <p:txBody>
           <a:bodyPr/>
           <a:p>
-            <a:fld id="{75869E4D-5735-4FF0-A624-432470B38502}" type="slidenum">
+            <a:fld id="{8C40D462-D360-4891-96B8-CC09E32B053D}" type="slidenum">
               <a:t>&lt;#&gt;</a:t>
             </a:fld>
           </a:p>
@@ -1360,14 +3868,14 @@
             <a:noAutofit/>
           </a:bodyPr>
           <a:p>
-            <a:pPr indent="0" algn="ctr">
+            <a:pPr indent="0">
               <a:buNone/>
             </a:pPr>
-            <a:endParaRPr b="0" lang="en-US" sz="4400" spc="-1" strike="noStrike">
-              <a:solidFill>
-                <a:srgbClr val="000000"/>
-              </a:solidFill>
-              <a:latin typeface="Arial"/>
+            <a:endParaRPr b="0" lang="en-US" sz="1800" spc="-1" strike="noStrike">
+              <a:solidFill>
+                <a:srgbClr val="000000"/>
+              </a:solidFill>
+              <a:latin typeface="Calibri"/>
             </a:endParaRPr>
           </a:p>
         </p:txBody>
@@ -1410,7 +3918,7 @@
               <a:solidFill>
                 <a:srgbClr val="000000"/>
               </a:solidFill>
-              <a:latin typeface="Arial"/>
+              <a:latin typeface="Calibri"/>
             </a:endParaRPr>
           </a:p>
         </p:txBody>
@@ -1453,7 +3961,7 @@
               <a:solidFill>
                 <a:srgbClr val="000000"/>
               </a:solidFill>
-              <a:latin typeface="Arial"/>
+              <a:latin typeface="Calibri"/>
             </a:endParaRPr>
           </a:p>
         </p:txBody>
@@ -1492,7 +4000,7 @@
         <p:txBody>
           <a:bodyPr/>
           <a:p>
-            <a:fld id="{0646C780-7F88-4D25-8FEA-4F4BA448690F}" type="slidenum">
+            <a:fld id="{D57F2C8D-842F-49CC-9581-A2C888BBDCE1}" type="slidenum">
               <a:t>&lt;#&gt;</a:t>
             </a:fld>
           </a:p>
@@ -1569,14 +4077,14 @@
             <a:noAutofit/>
           </a:bodyPr>
           <a:p>
-            <a:pPr indent="0" algn="ctr">
+            <a:pPr indent="0">
               <a:buNone/>
             </a:pPr>
-            <a:endParaRPr b="0" lang="en-US" sz="4400" spc="-1" strike="noStrike">
-              <a:solidFill>
-                <a:srgbClr val="000000"/>
-              </a:solidFill>
-              <a:latin typeface="Arial"/>
+            <a:endParaRPr b="0" lang="en-US" sz="1800" spc="-1" strike="noStrike">
+              <a:solidFill>
+                <a:srgbClr val="000000"/>
+              </a:solidFill>
+              <a:latin typeface="Calibri"/>
             </a:endParaRPr>
           </a:p>
         </p:txBody>
@@ -1615,7 +4123,7 @@
         <p:txBody>
           <a:bodyPr/>
           <a:p>
-            <a:fld id="{D3A09BBD-C1D0-4A67-BDDF-B17065F1B4E2}" type="slidenum">
+            <a:fld id="{7FAFD558-94B3-4DE1-A3DE-D6560598B036}" type="slidenum">
               <a:t>&lt;#&gt;</a:t>
             </a:fld>
           </a:p>
@@ -1736,7 +4244,7 @@
         <p:txBody>
           <a:bodyPr/>
           <a:p>
-            <a:fld id="{1965B346-04E6-4EBE-9DE1-86EF5A74DB30}" type="slidenum">
+            <a:fld id="{5E64C49D-AC09-4A02-A183-41F20EF8D63A}" type="slidenum">
               <a:t>&lt;#&gt;</a:t>
             </a:fld>
           </a:p>
@@ -1813,14 +4321,14 @@
             <a:noAutofit/>
           </a:bodyPr>
           <a:p>
-            <a:pPr indent="0" algn="ctr">
+            <a:pPr indent="0">
               <a:buNone/>
             </a:pPr>
-            <a:endParaRPr b="0" lang="en-US" sz="4400" spc="-1" strike="noStrike">
-              <a:solidFill>
-                <a:srgbClr val="000000"/>
-              </a:solidFill>
-              <a:latin typeface="Arial"/>
+            <a:endParaRPr b="0" lang="en-US" sz="1800" spc="-1" strike="noStrike">
+              <a:solidFill>
+                <a:srgbClr val="000000"/>
+              </a:solidFill>
+              <a:latin typeface="Calibri"/>
             </a:endParaRPr>
           </a:p>
         </p:txBody>
@@ -1863,7 +4371,7 @@
               <a:solidFill>
                 <a:srgbClr val="000000"/>
               </a:solidFill>
-              <a:latin typeface="Arial"/>
+              <a:latin typeface="Calibri"/>
             </a:endParaRPr>
           </a:p>
         </p:txBody>
@@ -1906,7 +4414,7 @@
               <a:solidFill>
                 <a:srgbClr val="000000"/>
               </a:solidFill>
-              <a:latin typeface="Arial"/>
+              <a:latin typeface="Calibri"/>
             </a:endParaRPr>
           </a:p>
         </p:txBody>
@@ -1949,7 +4457,7 @@
               <a:solidFill>
                 <a:srgbClr val="000000"/>
               </a:solidFill>
-              <a:latin typeface="Arial"/>
+              <a:latin typeface="Calibri"/>
             </a:endParaRPr>
           </a:p>
         </p:txBody>
@@ -1988,7 +4496,7 @@
         <p:txBody>
           <a:bodyPr/>
           <a:p>
-            <a:fld id="{D2116120-5326-4C7F-A417-DDF5B8D0C19F}" type="slidenum">
+            <a:fld id="{139824BB-9A67-45CF-91E6-A2FA75E57042}" type="slidenum">
               <a:t>&lt;#&gt;</a:t>
             </a:fld>
           </a:p>
@@ -2065,14 +4573,14 @@
             <a:noAutofit/>
           </a:bodyPr>
           <a:p>
-            <a:pPr indent="0" algn="ctr">
+            <a:pPr indent="0">
               <a:buNone/>
             </a:pPr>
-            <a:endParaRPr b="0" lang="en-US" sz="4400" spc="-1" strike="noStrike">
-              <a:solidFill>
-                <a:srgbClr val="000000"/>
-              </a:solidFill>
-              <a:latin typeface="Arial"/>
+            <a:endParaRPr b="0" lang="en-US" sz="1800" spc="-1" strike="noStrike">
+              <a:solidFill>
+                <a:srgbClr val="000000"/>
+              </a:solidFill>
+              <a:latin typeface="Calibri"/>
             </a:endParaRPr>
           </a:p>
         </p:txBody>
@@ -2115,7 +4623,7 @@
               <a:solidFill>
                 <a:srgbClr val="000000"/>
               </a:solidFill>
-              <a:latin typeface="Arial"/>
+              <a:latin typeface="Calibri"/>
             </a:endParaRPr>
           </a:p>
         </p:txBody>
@@ -2158,7 +4666,7 @@
               <a:solidFill>
                 <a:srgbClr val="000000"/>
               </a:solidFill>
-              <a:latin typeface="Arial"/>
+              <a:latin typeface="Calibri"/>
             </a:endParaRPr>
           </a:p>
         </p:txBody>
@@ -2201,7 +4709,7 @@
               <a:solidFill>
                 <a:srgbClr val="000000"/>
               </a:solidFill>
-              <a:latin typeface="Arial"/>
+              <a:latin typeface="Calibri"/>
             </a:endParaRPr>
           </a:p>
         </p:txBody>
@@ -2240,7 +4748,7 @@
         <p:txBody>
           <a:bodyPr/>
           <a:p>
-            <a:fld id="{CE956BB5-7F22-4930-9345-CED1CF2A53FC}" type="slidenum">
+            <a:fld id="{A92CA3D7-7D1F-4581-928D-9ED0B296EC15}" type="slidenum">
               <a:t>&lt;#&gt;</a:t>
             </a:fld>
           </a:p>
@@ -2317,14 +4825,14 @@
             <a:noAutofit/>
           </a:bodyPr>
           <a:p>
-            <a:pPr indent="0" algn="ctr">
+            <a:pPr indent="0">
               <a:buNone/>
             </a:pPr>
-            <a:endParaRPr b="0" lang="en-US" sz="4400" spc="-1" strike="noStrike">
-              <a:solidFill>
-                <a:srgbClr val="000000"/>
-              </a:solidFill>
-              <a:latin typeface="Arial"/>
+            <a:endParaRPr b="0" lang="en-US" sz="1800" spc="-1" strike="noStrike">
+              <a:solidFill>
+                <a:srgbClr val="000000"/>
+              </a:solidFill>
+              <a:latin typeface="Calibri"/>
             </a:endParaRPr>
           </a:p>
         </p:txBody>
@@ -2367,7 +4875,7 @@
               <a:solidFill>
                 <a:srgbClr val="000000"/>
               </a:solidFill>
-              <a:latin typeface="Arial"/>
+              <a:latin typeface="Calibri"/>
             </a:endParaRPr>
           </a:p>
         </p:txBody>
@@ -2410,7 +4918,7 @@
               <a:solidFill>
                 <a:srgbClr val="000000"/>
               </a:solidFill>
-              <a:latin typeface="Arial"/>
+              <a:latin typeface="Calibri"/>
             </a:endParaRPr>
           </a:p>
         </p:txBody>
@@ -2453,7 +4961,7 @@
               <a:solidFill>
                 <a:srgbClr val="000000"/>
               </a:solidFill>
-              <a:latin typeface="Arial"/>
+              <a:latin typeface="Calibri"/>
             </a:endParaRPr>
           </a:p>
         </p:txBody>
@@ -2492,7 +5000,7 @@
         <p:txBody>
           <a:bodyPr/>
           <a:p>
-            <a:fld id="{D9BD5B85-093E-4E9C-82C4-2384B888243C}" type="slidenum">
+            <a:fld id="{C50CC7ED-71EA-4F85-8623-E34D822FC75E}" type="slidenum">
               <a:t>&lt;#&gt;</a:t>
             </a:fld>
           </a:p>
@@ -2561,7 +5069,7 @@
         <p:spPr>
           <a:xfrm>
             <a:off x="3124080" y="6356520"/>
-            <a:ext cx="2894760" cy="364320"/>
+            <a:ext cx="2894400" cy="363960"/>
           </a:xfrm>
           <a:prstGeom prst="rect">
             <a:avLst/>
@@ -2633,7 +5141,7 @@
         <p:spPr>
           <a:xfrm>
             <a:off x="6553080" y="6356520"/>
-            <a:ext cx="2133000" cy="364320"/>
+            <a:ext cx="2132640" cy="363960"/>
           </a:xfrm>
           <a:prstGeom prst="rect">
             <a:avLst/>
@@ -2674,7 +5182,7 @@
                 <a:tab algn="l" pos="0"/>
               </a:tabLst>
             </a:pPr>
-            <a:fld id="{845CE056-11AB-4E79-ADD8-2C2342A18FF4}" type="slidenum">
+            <a:fld id="{D53465CB-D1FA-4519-AA30-38F88C34D1DC}" type="slidenum">
               <a:rPr b="0" lang="en-US" sz="1200" spc="-1" strike="noStrike">
                 <a:solidFill>
                   <a:srgbClr val="8b8b8b"/>
@@ -2705,7 +5213,7 @@
         <p:spPr>
           <a:xfrm>
             <a:off x="457200" y="6356520"/>
-            <a:ext cx="2133000" cy="364320"/>
+            <a:ext cx="2132640" cy="363960"/>
           </a:xfrm>
           <a:prstGeom prst="rect">
             <a:avLst/>
@@ -3042,6 +5550,516 @@
     <p:sldLayoutId id="2147483658" r:id="rId11"/>
     <p:sldLayoutId id="2147483659" r:id="rId12"/>
     <p:sldLayoutId id="2147483660" r:id="rId13"/>
+  </p:sldLayoutIdLst>
+</p:sldMaster>
+</file>
+
+<file path=ppt/slideMasters/slideMaster2.xml><?xml version="1.0" encoding="utf-8"?>
+<p:sldMaster xmlns:a="http://schemas.openxmlformats.org/drawingml/2006/main" xmlns:p="http://schemas.openxmlformats.org/presentationml/2006/main" xmlns:r="http://schemas.openxmlformats.org/officeDocument/2006/relationships" xmlns:p14="http://schemas.microsoft.com/office/powerpoint/2010/main" xmlns:p15="http://schemas.microsoft.com/office/powerpoint/2012/main" xmlns:mc="http://schemas.openxmlformats.org/markup-compatibility/2006">
+  <p:cSld>
+    <p:bg>
+      <p:bgPr>
+        <a:solidFill>
+          <a:srgbClr val="ffffff"/>
+        </a:solidFill>
+      </p:bgPr>
+    </p:bg>
+    <p:spTree>
+      <p:nvGrpSpPr>
+        <p:cNvPr id="1" name=""/>
+        <p:cNvGrpSpPr/>
+        <p:nvPr/>
+      </p:nvGrpSpPr>
+      <p:grpSpPr>
+        <a:xfrm>
+          <a:off x="0" y="0"/>
+          <a:ext cx="0" cy="0"/>
+          <a:chOff x="0" y="0"/>
+          <a:chExt cx="0" cy="0"/>
+        </a:xfrm>
+      </p:grpSpPr>
+      <p:sp>
+        <p:nvSpPr>
+          <p:cNvPr id="41" name="PlaceHolder 1"/>
+          <p:cNvSpPr>
+            <a:spLocks noGrp="1"/>
+          </p:cNvSpPr>
+          <p:nvPr>
+            <p:ph type="dt" idx="4"/>
+          </p:nvPr>
+        </p:nvSpPr>
+        <p:spPr>
+          <a:xfrm>
+            <a:off x="457200" y="6356520"/>
+            <a:ext cx="2133360" cy="364680"/>
+          </a:xfrm>
+          <a:prstGeom prst="rect">
+            <a:avLst/>
+          </a:prstGeom>
+          <a:noFill/>
+          <a:ln w="0">
+            <a:noFill/>
+          </a:ln>
+        </p:spPr>
+        <p:txBody>
+          <a:bodyPr anchor="ctr">
+            <a:noAutofit/>
+          </a:bodyPr>
+          <a:lstStyle>
+            <a:lvl1pPr indent="0">
+              <a:lnSpc>
+                <a:spcPct val="100000"/>
+              </a:lnSpc>
+              <a:buNone/>
+              <a:defRPr b="0" lang="en-US" sz="1200" spc="-1" strike="noStrike">
+                <a:solidFill>
+                  <a:srgbClr val="8b8b8b"/>
+                </a:solidFill>
+                <a:latin typeface="Calibri"/>
+              </a:defRPr>
+            </a:lvl1pPr>
+          </a:lstStyle>
+          <a:p>
+            <a:pPr indent="0">
+              <a:lnSpc>
+                <a:spcPct val="100000"/>
+              </a:lnSpc>
+              <a:buNone/>
+            </a:pPr>
+            <a:r>
+              <a:rPr b="0" lang="en-US" sz="1200" spc="-1" strike="noStrike">
+                <a:solidFill>
+                  <a:srgbClr val="8b8b8b"/>
+                </a:solidFill>
+                <a:latin typeface="Calibri"/>
+              </a:rPr>
+              <a:t>&lt;date/time&gt;</a:t>
+            </a:r>
+            <a:endParaRPr b="0" lang="en-US" sz="1200" spc="-1" strike="noStrike">
+              <a:solidFill>
+                <a:srgbClr val="000000"/>
+              </a:solidFill>
+              <a:latin typeface="Times New Roman"/>
+            </a:endParaRPr>
+          </a:p>
+        </p:txBody>
+      </p:sp>
+      <p:sp>
+        <p:nvSpPr>
+          <p:cNvPr id="42" name="PlaceHolder 2"/>
+          <p:cNvSpPr>
+            <a:spLocks noGrp="1"/>
+          </p:cNvSpPr>
+          <p:nvPr>
+            <p:ph type="ftr" idx="5"/>
+          </p:nvPr>
+        </p:nvSpPr>
+        <p:spPr>
+          <a:xfrm>
+            <a:off x="3124080" y="6356520"/>
+            <a:ext cx="2895120" cy="364680"/>
+          </a:xfrm>
+          <a:prstGeom prst="rect">
+            <a:avLst/>
+          </a:prstGeom>
+          <a:noFill/>
+          <a:ln w="0">
+            <a:noFill/>
+          </a:ln>
+        </p:spPr>
+        <p:txBody>
+          <a:bodyPr anchor="ctr">
+            <a:noAutofit/>
+          </a:bodyPr>
+          <a:lstStyle>
+            <a:lvl1pPr indent="0" algn="ctr">
+              <a:buNone/>
+              <a:defRPr b="0" lang="en-US" sz="1400" spc="-1" strike="noStrike">
+                <a:solidFill>
+                  <a:srgbClr val="000000"/>
+                </a:solidFill>
+                <a:latin typeface="Times New Roman"/>
+              </a:defRPr>
+            </a:lvl1pPr>
+          </a:lstStyle>
+          <a:p>
+            <a:pPr indent="0" algn="ctr">
+              <a:buNone/>
+            </a:pPr>
+            <a:r>
+              <a:rPr b="0" lang="en-US" sz="1400" spc="-1" strike="noStrike">
+                <a:solidFill>
+                  <a:srgbClr val="000000"/>
+                </a:solidFill>
+                <a:latin typeface="Times New Roman"/>
+              </a:rPr>
+              <a:t>&lt;footer&gt;</a:t>
+            </a:r>
+            <a:endParaRPr b="0" lang="en-US" sz="1400" spc="-1" strike="noStrike">
+              <a:solidFill>
+                <a:srgbClr val="000000"/>
+              </a:solidFill>
+              <a:latin typeface="Times New Roman"/>
+            </a:endParaRPr>
+          </a:p>
+        </p:txBody>
+      </p:sp>
+      <p:sp>
+        <p:nvSpPr>
+          <p:cNvPr id="43" name="PlaceHolder 3"/>
+          <p:cNvSpPr>
+            <a:spLocks noGrp="1"/>
+          </p:cNvSpPr>
+          <p:nvPr>
+            <p:ph type="sldNum" idx="6"/>
+          </p:nvPr>
+        </p:nvSpPr>
+        <p:spPr>
+          <a:xfrm>
+            <a:off x="6553080" y="6356520"/>
+            <a:ext cx="2133360" cy="364680"/>
+          </a:xfrm>
+          <a:prstGeom prst="rect">
+            <a:avLst/>
+          </a:prstGeom>
+          <a:noFill/>
+          <a:ln w="0">
+            <a:noFill/>
+          </a:ln>
+        </p:spPr>
+        <p:txBody>
+          <a:bodyPr anchor="ctr">
+            <a:noAutofit/>
+          </a:bodyPr>
+          <a:lstStyle>
+            <a:lvl1pPr indent="0" algn="r">
+              <a:lnSpc>
+                <a:spcPct val="100000"/>
+              </a:lnSpc>
+              <a:buNone/>
+              <a:defRPr b="0" lang="en-US" sz="1200" spc="-1" strike="noStrike">
+                <a:solidFill>
+                  <a:srgbClr val="8b8b8b"/>
+                </a:solidFill>
+                <a:latin typeface="Calibri"/>
+              </a:defRPr>
+            </a:lvl1pPr>
+          </a:lstStyle>
+          <a:p>
+            <a:pPr indent="0" algn="r">
+              <a:lnSpc>
+                <a:spcPct val="100000"/>
+              </a:lnSpc>
+              <a:buNone/>
+            </a:pPr>
+            <a:fld id="{B1D5743B-DA6B-4875-B996-0A467D255309}" type="slidenum">
+              <a:rPr b="0" lang="en-US" sz="1200" spc="-1" strike="noStrike">
+                <a:solidFill>
+                  <a:srgbClr val="8b8b8b"/>
+                </a:solidFill>
+                <a:latin typeface="Calibri"/>
+              </a:rPr>
+              <a:t>&lt;number&gt;</a:t>
+            </a:fld>
+            <a:endParaRPr b="0" lang="en-US" sz="1200" spc="-1" strike="noStrike">
+              <a:solidFill>
+                <a:srgbClr val="000000"/>
+              </a:solidFill>
+              <a:latin typeface="Times New Roman"/>
+            </a:endParaRPr>
+          </a:p>
+        </p:txBody>
+      </p:sp>
+      <p:sp>
+        <p:nvSpPr>
+          <p:cNvPr id="44" name="PlaceHolder 4"/>
+          <p:cNvSpPr>
+            <a:spLocks noGrp="1"/>
+          </p:cNvSpPr>
+          <p:nvPr>
+            <p:ph type="title"/>
+          </p:nvPr>
+        </p:nvSpPr>
+        <p:spPr>
+          <a:xfrm>
+            <a:off x="609480" y="273600"/>
+            <a:ext cx="10972440" cy="1144800"/>
+          </a:xfrm>
+          <a:prstGeom prst="rect">
+            <a:avLst/>
+          </a:prstGeom>
+          <a:noFill/>
+          <a:ln w="0">
+            <a:noFill/>
+          </a:ln>
+        </p:spPr>
+        <p:txBody>
+          <a:bodyPr lIns="0" rIns="0" tIns="0" bIns="0" anchor="ctr">
+            <a:noAutofit/>
+          </a:bodyPr>
+          <a:p>
+            <a:pPr indent="0">
+              <a:buNone/>
+            </a:pPr>
+            <a:r>
+              <a:rPr b="0" lang="en-US" sz="1800" spc="-1" strike="noStrike">
+                <a:solidFill>
+                  <a:srgbClr val="000000"/>
+                </a:solidFill>
+                <a:latin typeface="Calibri"/>
+              </a:rPr>
+              <a:t>Click to edit the title text format</a:t>
+            </a:r>
+            <a:endParaRPr b="0" lang="en-US" sz="1800" spc="-1" strike="noStrike">
+              <a:solidFill>
+                <a:srgbClr val="000000"/>
+              </a:solidFill>
+              <a:latin typeface="Calibri"/>
+            </a:endParaRPr>
+          </a:p>
+        </p:txBody>
+      </p:sp>
+      <p:sp>
+        <p:nvSpPr>
+          <p:cNvPr id="45" name="PlaceHolder 5"/>
+          <p:cNvSpPr>
+            <a:spLocks noGrp="1"/>
+          </p:cNvSpPr>
+          <p:nvPr>
+            <p:ph type="body"/>
+          </p:nvPr>
+        </p:nvSpPr>
+        <p:spPr>
+          <a:xfrm>
+            <a:off x="609480" y="1604520"/>
+            <a:ext cx="10972440" cy="3977280"/>
+          </a:xfrm>
+          <a:prstGeom prst="rect">
+            <a:avLst/>
+          </a:prstGeom>
+          <a:noFill/>
+          <a:ln w="0">
+            <a:noFill/>
+          </a:ln>
+        </p:spPr>
+        <p:txBody>
+          <a:bodyPr lIns="0" rIns="0" tIns="0" bIns="0" anchor="t">
+            <a:normAutofit/>
+          </a:bodyPr>
+          <a:p>
+            <a:pPr marL="432000" indent="-324000">
+              <a:spcBef>
+                <a:spcPts val="1417"/>
+              </a:spcBef>
+              <a:buClr>
+                <a:srgbClr val="000000"/>
+              </a:buClr>
+              <a:buSzPct val="45000"/>
+              <a:buFont typeface="Wingdings" charset="2"/>
+              <a:buChar char=""/>
+            </a:pPr>
+            <a:r>
+              <a:rPr b="0" lang="en-US" sz="3200" spc="-1" strike="noStrike">
+                <a:solidFill>
+                  <a:srgbClr val="000000"/>
+                </a:solidFill>
+                <a:latin typeface="Calibri"/>
+              </a:rPr>
+              <a:t>Click to edit the outline text format</a:t>
+            </a:r>
+            <a:endParaRPr b="0" lang="en-US" sz="3200" spc="-1" strike="noStrike">
+              <a:solidFill>
+                <a:srgbClr val="000000"/>
+              </a:solidFill>
+              <a:latin typeface="Calibri"/>
+            </a:endParaRPr>
+          </a:p>
+          <a:p>
+            <a:pPr lvl="1" marL="864000" indent="-324000">
+              <a:spcBef>
+                <a:spcPts val="1134"/>
+              </a:spcBef>
+              <a:buClr>
+                <a:srgbClr val="000000"/>
+              </a:buClr>
+              <a:buSzPct val="75000"/>
+              <a:buFont typeface="Symbol" charset="2"/>
+              <a:buChar char=""/>
+            </a:pPr>
+            <a:r>
+              <a:rPr b="0" lang="en-US" sz="2400" spc="-1" strike="noStrike">
+                <a:solidFill>
+                  <a:srgbClr val="000000"/>
+                </a:solidFill>
+                <a:latin typeface="Calibri"/>
+              </a:rPr>
+              <a:t>Second Outline Level</a:t>
+            </a:r>
+            <a:endParaRPr b="0" lang="en-US" sz="2400" spc="-1" strike="noStrike">
+              <a:solidFill>
+                <a:srgbClr val="000000"/>
+              </a:solidFill>
+              <a:latin typeface="Calibri"/>
+            </a:endParaRPr>
+          </a:p>
+          <a:p>
+            <a:pPr lvl="2" marL="1296000" indent="-288000">
+              <a:spcBef>
+                <a:spcPts val="850"/>
+              </a:spcBef>
+              <a:buClr>
+                <a:srgbClr val="000000"/>
+              </a:buClr>
+              <a:buSzPct val="45000"/>
+              <a:buFont typeface="Wingdings" charset="2"/>
+              <a:buChar char=""/>
+            </a:pPr>
+            <a:r>
+              <a:rPr b="0" lang="en-US" sz="2000" spc="-1" strike="noStrike">
+                <a:solidFill>
+                  <a:srgbClr val="000000"/>
+                </a:solidFill>
+                <a:latin typeface="Calibri"/>
+              </a:rPr>
+              <a:t>Third Outline Level</a:t>
+            </a:r>
+            <a:endParaRPr b="0" lang="en-US" sz="2000" spc="-1" strike="noStrike">
+              <a:solidFill>
+                <a:srgbClr val="000000"/>
+              </a:solidFill>
+              <a:latin typeface="Calibri"/>
+            </a:endParaRPr>
+          </a:p>
+          <a:p>
+            <a:pPr lvl="3" marL="1728000" indent="-216000">
+              <a:spcBef>
+                <a:spcPts val="567"/>
+              </a:spcBef>
+              <a:buClr>
+                <a:srgbClr val="000000"/>
+              </a:buClr>
+              <a:buSzPct val="75000"/>
+              <a:buFont typeface="Symbol" charset="2"/>
+              <a:buChar char=""/>
+            </a:pPr>
+            <a:r>
+              <a:rPr b="0" lang="en-US" sz="2000" spc="-1" strike="noStrike">
+                <a:solidFill>
+                  <a:srgbClr val="000000"/>
+                </a:solidFill>
+                <a:latin typeface="Calibri"/>
+              </a:rPr>
+              <a:t>Fourth Outline Level</a:t>
+            </a:r>
+            <a:endParaRPr b="0" lang="en-US" sz="2000" spc="-1" strike="noStrike">
+              <a:solidFill>
+                <a:srgbClr val="000000"/>
+              </a:solidFill>
+              <a:latin typeface="Calibri"/>
+            </a:endParaRPr>
+          </a:p>
+          <a:p>
+            <a:pPr lvl="4" marL="2160000" indent="-216000">
+              <a:spcBef>
+                <a:spcPts val="283"/>
+              </a:spcBef>
+              <a:buClr>
+                <a:srgbClr val="000000"/>
+              </a:buClr>
+              <a:buSzPct val="45000"/>
+              <a:buFont typeface="Wingdings" charset="2"/>
+              <a:buChar char=""/>
+            </a:pPr>
+            <a:r>
+              <a:rPr b="0" lang="en-US" sz="2000" spc="-1" strike="noStrike">
+                <a:solidFill>
+                  <a:srgbClr val="000000"/>
+                </a:solidFill>
+                <a:latin typeface="Calibri"/>
+              </a:rPr>
+              <a:t>Fifth Outline Level</a:t>
+            </a:r>
+            <a:endParaRPr b="0" lang="en-US" sz="2000" spc="-1" strike="noStrike">
+              <a:solidFill>
+                <a:srgbClr val="000000"/>
+              </a:solidFill>
+              <a:latin typeface="Calibri"/>
+            </a:endParaRPr>
+          </a:p>
+          <a:p>
+            <a:pPr lvl="5" marL="2592000" indent="-216000">
+              <a:spcBef>
+                <a:spcPts val="283"/>
+              </a:spcBef>
+              <a:buClr>
+                <a:srgbClr val="000000"/>
+              </a:buClr>
+              <a:buSzPct val="45000"/>
+              <a:buFont typeface="Wingdings" charset="2"/>
+              <a:buChar char=""/>
+            </a:pPr>
+            <a:r>
+              <a:rPr b="0" lang="en-US" sz="2000" spc="-1" strike="noStrike">
+                <a:solidFill>
+                  <a:srgbClr val="000000"/>
+                </a:solidFill>
+                <a:latin typeface="Calibri"/>
+              </a:rPr>
+              <a:t>Sixth Outline Level</a:t>
+            </a:r>
+            <a:endParaRPr b="0" lang="en-US" sz="2000" spc="-1" strike="noStrike">
+              <a:solidFill>
+                <a:srgbClr val="000000"/>
+              </a:solidFill>
+              <a:latin typeface="Calibri"/>
+            </a:endParaRPr>
+          </a:p>
+          <a:p>
+            <a:pPr lvl="6" marL="3024000" indent="-216000">
+              <a:spcBef>
+                <a:spcPts val="283"/>
+              </a:spcBef>
+              <a:buClr>
+                <a:srgbClr val="000000"/>
+              </a:buClr>
+              <a:buSzPct val="45000"/>
+              <a:buFont typeface="Wingdings" charset="2"/>
+              <a:buChar char=""/>
+            </a:pPr>
+            <a:r>
+              <a:rPr b="0" lang="en-US" sz="2000" spc="-1" strike="noStrike">
+                <a:solidFill>
+                  <a:srgbClr val="000000"/>
+                </a:solidFill>
+                <a:latin typeface="Calibri"/>
+              </a:rPr>
+              <a:t>Seventh Outline Level</a:t>
+            </a:r>
+            <a:endParaRPr b="0" lang="en-US" sz="2000" spc="-1" strike="noStrike">
+              <a:solidFill>
+                <a:srgbClr val="000000"/>
+              </a:solidFill>
+              <a:latin typeface="Calibri"/>
+            </a:endParaRPr>
+          </a:p>
+        </p:txBody>
+      </p:sp>
+    </p:spTree>
+  </p:cSld>
+  <p:clrMap bg1="lt1" bg2="lt2" tx1="dk1" tx2="dk2" accent1="accent1" accent2="accent2" accent3="accent3" accent4="accent4" accent5="accent5" accent6="accent6" hlink="hlink" folHlink="folHlink"/>
+  <p:sldLayoutIdLst>
+    <p:sldLayoutId id="2147483662" r:id="rId2"/>
+    <p:sldLayoutId id="2147483663" r:id="rId3"/>
+    <p:sldLayoutId id="2147483664" r:id="rId4"/>
+    <p:sldLayoutId id="2147483665" r:id="rId5"/>
+    <p:sldLayoutId id="2147483666" r:id="rId6"/>
+    <p:sldLayoutId id="2147483667" r:id="rId7"/>
+    <p:sldLayoutId id="2147483668" r:id="rId8"/>
+    <p:sldLayoutId id="2147483669" r:id="rId9"/>
+    <p:sldLayoutId id="2147483670" r:id="rId10"/>
+    <p:sldLayoutId id="2147483671" r:id="rId11"/>
+    <p:sldLayoutId id="2147483672" r:id="rId12"/>
+    <p:sldLayoutId id="2147483673" r:id="rId13"/>
   </p:sldLayoutIdLst>
 </p:sldMaster>
 </file>
@@ -3072,14 +6090,14 @@
       </p:grpSpPr>
       <p:sp>
         <p:nvSpPr>
-          <p:cNvPr id="41" name="Rectangle 1"/>
+          <p:cNvPr id="82" name="Rectangle 1"/>
           <p:cNvSpPr/>
           <p:nvPr/>
         </p:nvSpPr>
         <p:spPr>
           <a:xfrm>
             <a:off x="0" y="2743200"/>
-            <a:ext cx="12191400" cy="1370880"/>
+            <a:ext cx="12191040" cy="1370520"/>
           </a:xfrm>
           <a:prstGeom prst="rect">
             <a:avLst/>
@@ -3132,14 +6150,14 @@
       </p:sp>
       <p:sp>
         <p:nvSpPr>
-          <p:cNvPr id="42" name="TextBox 2"/>
+          <p:cNvPr id="83" name="TextBox 2"/>
           <p:cNvSpPr/>
           <p:nvPr/>
         </p:nvSpPr>
         <p:spPr>
           <a:xfrm>
             <a:off x="731520" y="2926080"/>
-            <a:ext cx="10667160" cy="881640"/>
+            <a:ext cx="10666800" cy="881640"/>
           </a:xfrm>
           <a:prstGeom prst="rect">
             <a:avLst/>
@@ -3186,14 +6204,14 @@
       </p:sp>
       <p:sp>
         <p:nvSpPr>
-          <p:cNvPr id="43" name="TextBox 3"/>
+          <p:cNvPr id="84" name="TextBox 3"/>
           <p:cNvSpPr/>
           <p:nvPr/>
         </p:nvSpPr>
         <p:spPr>
           <a:xfrm>
             <a:off x="731520" y="3474720"/>
-            <a:ext cx="10667160" cy="424800"/>
+            <a:ext cx="10666800" cy="424800"/>
           </a:xfrm>
           <a:prstGeom prst="rect">
             <a:avLst/>
@@ -3240,14 +6258,14 @@
       </p:sp>
       <p:sp>
         <p:nvSpPr>
-          <p:cNvPr id="44" name="Rectangle 4"/>
+          <p:cNvPr id="85" name="Rectangle 4"/>
           <p:cNvSpPr/>
           <p:nvPr/>
         </p:nvSpPr>
         <p:spPr>
           <a:xfrm>
             <a:off x="4572000" y="3936960"/>
-            <a:ext cx="3047400" cy="45000"/>
+            <a:ext cx="3047040" cy="44640"/>
           </a:xfrm>
           <a:prstGeom prst="rect">
             <a:avLst/>
@@ -3300,14 +6318,14 @@
       </p:sp>
       <p:sp>
         <p:nvSpPr>
-          <p:cNvPr id="45" name="TextBox 5"/>
+          <p:cNvPr id="86" name="TextBox 5"/>
           <p:cNvSpPr/>
           <p:nvPr/>
         </p:nvSpPr>
         <p:spPr>
           <a:xfrm>
             <a:off x="731520" y="4200120"/>
-            <a:ext cx="10667160" cy="302760"/>
+            <a:ext cx="10666800" cy="302760"/>
           </a:xfrm>
           <a:prstGeom prst="rect">
             <a:avLst/>
@@ -3354,14 +6372,14 @@
       </p:sp>
       <p:sp>
         <p:nvSpPr>
-          <p:cNvPr id="46" name="TextBox 6"/>
+          <p:cNvPr id="87" name="TextBox 6"/>
           <p:cNvSpPr/>
           <p:nvPr/>
         </p:nvSpPr>
         <p:spPr>
           <a:xfrm>
             <a:off x="731520" y="5943600"/>
-            <a:ext cx="10667160" cy="272160"/>
+            <a:ext cx="10666800" cy="272160"/>
           </a:xfrm>
           <a:prstGeom prst="rect">
             <a:avLst/>
@@ -3445,14 +6463,14 @@
       </p:grpSpPr>
       <p:sp>
         <p:nvSpPr>
-          <p:cNvPr id="47" name="TextBox 1"/>
+          <p:cNvPr id="88" name="TextBox 1"/>
           <p:cNvSpPr/>
           <p:nvPr/>
         </p:nvSpPr>
         <p:spPr>
           <a:xfrm>
             <a:off x="731520" y="411480"/>
-            <a:ext cx="10667160" cy="638280"/>
+            <a:ext cx="10666800" cy="638280"/>
           </a:xfrm>
           <a:prstGeom prst="rect">
             <a:avLst/>
@@ -3499,14 +6517,14 @@
       </p:sp>
       <p:sp>
         <p:nvSpPr>
-          <p:cNvPr id="48" name="Rectangle 2"/>
+          <p:cNvPr id="89" name="Rectangle 2"/>
           <p:cNvSpPr/>
           <p:nvPr/>
         </p:nvSpPr>
         <p:spPr>
           <a:xfrm>
             <a:off x="731520" y="960120"/>
-            <a:ext cx="1828080" cy="45000"/>
+            <a:ext cx="1827720" cy="44640"/>
           </a:xfrm>
           <a:prstGeom prst="rect">
             <a:avLst/>
@@ -3559,14 +6577,14 @@
       </p:sp>
       <p:sp>
         <p:nvSpPr>
-          <p:cNvPr id="49" name="TextBox 3"/>
+          <p:cNvPr id="90" name="TextBox 3"/>
           <p:cNvSpPr/>
           <p:nvPr/>
         </p:nvSpPr>
         <p:spPr>
           <a:xfrm>
             <a:off x="731520" y="1188720"/>
-            <a:ext cx="10667160" cy="4660200"/>
+            <a:ext cx="10666800" cy="4660200"/>
           </a:xfrm>
           <a:prstGeom prst="rect">
             <a:avLst/>
@@ -4067,14 +7085,14 @@
       </p:grpSpPr>
       <p:sp>
         <p:nvSpPr>
-          <p:cNvPr id="50" name="TextBox 1"/>
+          <p:cNvPr id="91" name="TextBox 1"/>
           <p:cNvSpPr/>
           <p:nvPr/>
         </p:nvSpPr>
         <p:spPr>
           <a:xfrm>
             <a:off x="731520" y="274320"/>
-            <a:ext cx="10667160" cy="638280"/>
+            <a:ext cx="10666800" cy="638280"/>
           </a:xfrm>
           <a:prstGeom prst="rect">
             <a:avLst/>
@@ -4121,14 +7139,14 @@
       </p:sp>
       <p:sp>
         <p:nvSpPr>
-          <p:cNvPr id="51" name="Rectangle 2"/>
+          <p:cNvPr id="92" name="Rectangle 2"/>
           <p:cNvSpPr/>
           <p:nvPr/>
         </p:nvSpPr>
         <p:spPr>
           <a:xfrm>
             <a:off x="731520" y="822960"/>
-            <a:ext cx="1828080" cy="45000"/>
+            <a:ext cx="1827720" cy="44640"/>
           </a:xfrm>
           <a:prstGeom prst="rect">
             <a:avLst/>
@@ -4181,7 +7199,7 @@
       </p:sp>
       <p:graphicFrame>
         <p:nvGraphicFramePr>
-          <p:cNvPr id="52" name="Table 3"/>
+          <p:cNvPr id="93" name="Table 3"/>
           <p:cNvGraphicFramePr/>
           <p:nvPr/>
         </p:nvGraphicFramePr>
@@ -6461,14 +9479,14 @@
       </p:grpSpPr>
       <p:sp>
         <p:nvSpPr>
-          <p:cNvPr id="53" name="TextBox 1"/>
+          <p:cNvPr id="94" name="TextBox 1"/>
           <p:cNvSpPr/>
           <p:nvPr/>
         </p:nvSpPr>
         <p:spPr>
           <a:xfrm>
             <a:off x="731520" y="320040"/>
-            <a:ext cx="10667160" cy="638280"/>
+            <a:ext cx="10666800" cy="638280"/>
           </a:xfrm>
           <a:prstGeom prst="rect">
             <a:avLst/>
@@ -6515,14 +9533,14 @@
       </p:sp>
       <p:sp>
         <p:nvSpPr>
-          <p:cNvPr id="54" name="Rectangle 2"/>
+          <p:cNvPr id="95" name="Rectangle 2"/>
           <p:cNvSpPr/>
           <p:nvPr/>
         </p:nvSpPr>
         <p:spPr>
           <a:xfrm>
             <a:off x="731520" y="868680"/>
-            <a:ext cx="1828080" cy="45000"/>
+            <a:ext cx="1827720" cy="44640"/>
           </a:xfrm>
           <a:prstGeom prst="rect">
             <a:avLst/>
@@ -6575,7 +9593,7 @@
       </p:sp>
       <p:graphicFrame>
         <p:nvGraphicFramePr>
-          <p:cNvPr id="55" name="Table 3"/>
+          <p:cNvPr id="96" name="Table 3"/>
           <p:cNvGraphicFramePr/>
           <p:nvPr/>
         </p:nvGraphicFramePr>
@@ -7672,14 +10690,14 @@
       </p:graphicFrame>
       <p:sp>
         <p:nvSpPr>
-          <p:cNvPr id="56" name="TextBox 4"/>
+          <p:cNvPr id="97" name="TextBox 4"/>
           <p:cNvSpPr/>
           <p:nvPr/>
         </p:nvSpPr>
         <p:spPr>
           <a:xfrm>
             <a:off x="731520" y="6217920"/>
-            <a:ext cx="10667160" cy="287640"/>
+            <a:ext cx="10666800" cy="287640"/>
           </a:xfrm>
           <a:prstGeom prst="rect">
             <a:avLst/>
@@ -7763,14 +10781,14 @@
       </p:grpSpPr>
       <p:sp>
         <p:nvSpPr>
-          <p:cNvPr id="57" name="TextBox 1"/>
+          <p:cNvPr id="98" name="TextBox 1"/>
           <p:cNvSpPr/>
           <p:nvPr/>
         </p:nvSpPr>
         <p:spPr>
           <a:xfrm>
             <a:off x="731520" y="274320"/>
-            <a:ext cx="10667160" cy="638280"/>
+            <a:ext cx="10666800" cy="638280"/>
           </a:xfrm>
           <a:prstGeom prst="rect">
             <a:avLst/>
@@ -7817,14 +10835,14 @@
       </p:sp>
       <p:sp>
         <p:nvSpPr>
-          <p:cNvPr id="58" name="Rectangle 2"/>
+          <p:cNvPr id="99" name="Rectangle 2"/>
           <p:cNvSpPr/>
           <p:nvPr/>
         </p:nvSpPr>
         <p:spPr>
           <a:xfrm>
             <a:off x="731520" y="822960"/>
-            <a:ext cx="1828080" cy="45000"/>
+            <a:ext cx="1827720" cy="44640"/>
           </a:xfrm>
           <a:prstGeom prst="rect">
             <a:avLst/>
@@ -7877,14 +10895,14 @@
       </p:sp>
       <p:sp>
         <p:nvSpPr>
-          <p:cNvPr id="59" name="Rounded Rectangle 3"/>
+          <p:cNvPr id="100" name="Rounded Rectangle 3"/>
           <p:cNvSpPr/>
           <p:nvPr/>
         </p:nvSpPr>
         <p:spPr>
           <a:xfrm>
             <a:off x="457200" y="1188720"/>
-            <a:ext cx="3474000" cy="1645200"/>
+            <a:ext cx="3473640" cy="1644840"/>
           </a:xfrm>
           <a:prstGeom prst="roundRect">
             <a:avLst>
@@ -7939,14 +10957,14 @@
       </p:sp>
       <p:sp>
         <p:nvSpPr>
-          <p:cNvPr id="60" name="TextBox 4"/>
+          <p:cNvPr id="101" name="TextBox 4"/>
           <p:cNvSpPr/>
           <p:nvPr/>
         </p:nvSpPr>
         <p:spPr>
           <a:xfrm>
             <a:off x="640080" y="1371600"/>
-            <a:ext cx="3108240" cy="363960"/>
+            <a:ext cx="3107880" cy="363960"/>
           </a:xfrm>
           <a:prstGeom prst="rect">
             <a:avLst/>
@@ -8003,14 +11021,14 @@
       </p:sp>
       <p:sp>
         <p:nvSpPr>
-          <p:cNvPr id="61" name="TextBox 5"/>
+          <p:cNvPr id="102" name="TextBox 5"/>
           <p:cNvSpPr/>
           <p:nvPr/>
         </p:nvSpPr>
         <p:spPr>
           <a:xfrm>
             <a:off x="640080" y="1920240"/>
-            <a:ext cx="3108240" cy="836280"/>
+            <a:ext cx="3107880" cy="836280"/>
           </a:xfrm>
           <a:prstGeom prst="rect">
             <a:avLst/>
@@ -8086,14 +11104,14 @@
       </p:sp>
       <p:sp>
         <p:nvSpPr>
-          <p:cNvPr id="62" name="Rounded Rectangle 6"/>
+          <p:cNvPr id="103" name="Rounded Rectangle 6"/>
           <p:cNvSpPr/>
           <p:nvPr/>
         </p:nvSpPr>
         <p:spPr>
           <a:xfrm>
             <a:off x="4206240" y="1188720"/>
-            <a:ext cx="3474000" cy="1645200"/>
+            <a:ext cx="3473640" cy="1644840"/>
           </a:xfrm>
           <a:prstGeom prst="roundRect">
             <a:avLst>
@@ -8148,14 +11166,14 @@
       </p:sp>
       <p:sp>
         <p:nvSpPr>
-          <p:cNvPr id="63" name="TextBox 7"/>
+          <p:cNvPr id="104" name="TextBox 7"/>
           <p:cNvSpPr/>
           <p:nvPr/>
         </p:nvSpPr>
         <p:spPr>
           <a:xfrm>
             <a:off x="4389120" y="1371600"/>
-            <a:ext cx="3108240" cy="363960"/>
+            <a:ext cx="3107880" cy="363960"/>
           </a:xfrm>
           <a:prstGeom prst="rect">
             <a:avLst/>
@@ -8212,14 +11230,14 @@
       </p:sp>
       <p:sp>
         <p:nvSpPr>
-          <p:cNvPr id="64" name="TextBox 8"/>
+          <p:cNvPr id="105" name="TextBox 8"/>
           <p:cNvSpPr/>
           <p:nvPr/>
         </p:nvSpPr>
         <p:spPr>
           <a:xfrm>
             <a:off x="4389120" y="1920240"/>
-            <a:ext cx="3108240" cy="836280"/>
+            <a:ext cx="3107880" cy="836280"/>
           </a:xfrm>
           <a:prstGeom prst="rect">
             <a:avLst/>
@@ -8295,14 +11313,14 @@
       </p:sp>
       <p:sp>
         <p:nvSpPr>
-          <p:cNvPr id="65" name="Rounded Rectangle 9"/>
+          <p:cNvPr id="106" name="Rounded Rectangle 9"/>
           <p:cNvSpPr/>
           <p:nvPr/>
         </p:nvSpPr>
         <p:spPr>
           <a:xfrm>
             <a:off x="7955280" y="1188720"/>
-            <a:ext cx="3474000" cy="1645200"/>
+            <a:ext cx="3473640" cy="1644840"/>
           </a:xfrm>
           <a:prstGeom prst="roundRect">
             <a:avLst>
@@ -8357,14 +11375,14 @@
       </p:sp>
       <p:sp>
         <p:nvSpPr>
-          <p:cNvPr id="66" name="TextBox 10"/>
+          <p:cNvPr id="107" name="TextBox 10"/>
           <p:cNvSpPr/>
           <p:nvPr/>
         </p:nvSpPr>
         <p:spPr>
           <a:xfrm>
             <a:off x="8138160" y="1371600"/>
-            <a:ext cx="3108240" cy="363960"/>
+            <a:ext cx="3107880" cy="363960"/>
           </a:xfrm>
           <a:prstGeom prst="rect">
             <a:avLst/>
@@ -8421,14 +11439,14 @@
       </p:sp>
       <p:sp>
         <p:nvSpPr>
-          <p:cNvPr id="67" name="TextBox 11"/>
+          <p:cNvPr id="108" name="TextBox 11"/>
           <p:cNvSpPr/>
           <p:nvPr/>
         </p:nvSpPr>
         <p:spPr>
           <a:xfrm>
             <a:off x="8138160" y="1920240"/>
-            <a:ext cx="3108240" cy="836280"/>
+            <a:ext cx="3107880" cy="836280"/>
           </a:xfrm>
           <a:prstGeom prst="rect">
             <a:avLst/>
@@ -8504,14 +11522,14 @@
       </p:sp>
       <p:sp>
         <p:nvSpPr>
-          <p:cNvPr id="68" name="Rounded Rectangle 12"/>
+          <p:cNvPr id="109" name="Rounded Rectangle 12"/>
           <p:cNvSpPr/>
           <p:nvPr/>
         </p:nvSpPr>
         <p:spPr>
           <a:xfrm>
             <a:off x="457200" y="3017520"/>
-            <a:ext cx="3474000" cy="1645200"/>
+            <a:ext cx="3473640" cy="1644840"/>
           </a:xfrm>
           <a:prstGeom prst="roundRect">
             <a:avLst>
@@ -8566,14 +11584,14 @@
       </p:sp>
       <p:sp>
         <p:nvSpPr>
-          <p:cNvPr id="69" name="TextBox 13"/>
+          <p:cNvPr id="110" name="TextBox 13"/>
           <p:cNvSpPr/>
           <p:nvPr/>
         </p:nvSpPr>
         <p:spPr>
           <a:xfrm>
             <a:off x="640080" y="3200400"/>
-            <a:ext cx="3108240" cy="363960"/>
+            <a:ext cx="3107880" cy="363960"/>
           </a:xfrm>
           <a:prstGeom prst="rect">
             <a:avLst/>
@@ -8630,14 +11648,14 @@
       </p:sp>
       <p:sp>
         <p:nvSpPr>
-          <p:cNvPr id="70" name="TextBox 14"/>
+          <p:cNvPr id="111" name="TextBox 14"/>
           <p:cNvSpPr/>
           <p:nvPr/>
         </p:nvSpPr>
         <p:spPr>
           <a:xfrm>
             <a:off x="640080" y="3749040"/>
-            <a:ext cx="3108240" cy="836280"/>
+            <a:ext cx="3107880" cy="836280"/>
           </a:xfrm>
           <a:prstGeom prst="rect">
             <a:avLst/>
@@ -8713,14 +11731,14 @@
       </p:sp>
       <p:sp>
         <p:nvSpPr>
-          <p:cNvPr id="71" name="Rounded Rectangle 15"/>
+          <p:cNvPr id="112" name="Rounded Rectangle 15"/>
           <p:cNvSpPr/>
           <p:nvPr/>
         </p:nvSpPr>
         <p:spPr>
           <a:xfrm>
             <a:off x="4206240" y="3017520"/>
-            <a:ext cx="3474000" cy="1645200"/>
+            <a:ext cx="3473640" cy="1644840"/>
           </a:xfrm>
           <a:prstGeom prst="roundRect">
             <a:avLst>
@@ -8775,14 +11793,14 @@
       </p:sp>
       <p:sp>
         <p:nvSpPr>
-          <p:cNvPr id="72" name="TextBox 16"/>
+          <p:cNvPr id="113" name="TextBox 16"/>
           <p:cNvSpPr/>
           <p:nvPr/>
         </p:nvSpPr>
         <p:spPr>
           <a:xfrm>
             <a:off x="4389120" y="3200400"/>
-            <a:ext cx="3108240" cy="363960"/>
+            <a:ext cx="3107880" cy="363960"/>
           </a:xfrm>
           <a:prstGeom prst="rect">
             <a:avLst/>
@@ -8839,14 +11857,14 @@
       </p:sp>
       <p:sp>
         <p:nvSpPr>
-          <p:cNvPr id="73" name="TextBox 17"/>
+          <p:cNvPr id="114" name="TextBox 17"/>
           <p:cNvSpPr/>
           <p:nvPr/>
         </p:nvSpPr>
         <p:spPr>
           <a:xfrm>
             <a:off x="4389120" y="3749040"/>
-            <a:ext cx="3108240" cy="836280"/>
+            <a:ext cx="3107880" cy="836280"/>
           </a:xfrm>
           <a:prstGeom prst="rect">
             <a:avLst/>
@@ -8922,14 +11940,14 @@
       </p:sp>
       <p:sp>
         <p:nvSpPr>
-          <p:cNvPr id="74" name="Rounded Rectangle 18"/>
+          <p:cNvPr id="115" name="Rounded Rectangle 18"/>
           <p:cNvSpPr/>
           <p:nvPr/>
         </p:nvSpPr>
         <p:spPr>
           <a:xfrm>
             <a:off x="7955280" y="3017520"/>
-            <a:ext cx="3474000" cy="1645200"/>
+            <a:ext cx="3473640" cy="1644840"/>
           </a:xfrm>
           <a:prstGeom prst="roundRect">
             <a:avLst>
@@ -8984,14 +12002,14 @@
       </p:sp>
       <p:sp>
         <p:nvSpPr>
-          <p:cNvPr id="75" name="TextBox 19"/>
+          <p:cNvPr id="116" name="TextBox 19"/>
           <p:cNvSpPr/>
           <p:nvPr/>
         </p:nvSpPr>
         <p:spPr>
           <a:xfrm>
             <a:off x="8138160" y="3200400"/>
-            <a:ext cx="3108240" cy="363960"/>
+            <a:ext cx="3107880" cy="363960"/>
           </a:xfrm>
           <a:prstGeom prst="rect">
             <a:avLst/>
@@ -9048,14 +12066,14 @@
       </p:sp>
       <p:sp>
         <p:nvSpPr>
-          <p:cNvPr id="76" name="TextBox 20"/>
+          <p:cNvPr id="117" name="TextBox 20"/>
           <p:cNvSpPr/>
           <p:nvPr/>
         </p:nvSpPr>
         <p:spPr>
           <a:xfrm>
             <a:off x="8138160" y="3749040"/>
-            <a:ext cx="3108240" cy="1110600"/>
+            <a:ext cx="3107880" cy="1110600"/>
           </a:xfrm>
           <a:prstGeom prst="rect">
             <a:avLst/>
@@ -9144,14 +12162,14 @@
       </p:sp>
       <p:sp>
         <p:nvSpPr>
-          <p:cNvPr id="77" name="Rounded Rectangle 21"/>
+          <p:cNvPr id="118" name="Rounded Rectangle 21"/>
           <p:cNvSpPr/>
           <p:nvPr/>
         </p:nvSpPr>
         <p:spPr>
           <a:xfrm>
             <a:off x="457200" y="4846320"/>
-            <a:ext cx="3474000" cy="1645200"/>
+            <a:ext cx="3473640" cy="1644840"/>
           </a:xfrm>
           <a:prstGeom prst="roundRect">
             <a:avLst>
@@ -9206,14 +12224,14 @@
       </p:sp>
       <p:sp>
         <p:nvSpPr>
-          <p:cNvPr id="78" name="TextBox 22"/>
+          <p:cNvPr id="119" name="TextBox 22"/>
           <p:cNvSpPr/>
           <p:nvPr/>
         </p:nvSpPr>
         <p:spPr>
           <a:xfrm>
             <a:off x="640080" y="5029200"/>
-            <a:ext cx="3108240" cy="363960"/>
+            <a:ext cx="3107880" cy="363960"/>
           </a:xfrm>
           <a:prstGeom prst="rect">
             <a:avLst/>
@@ -9270,14 +12288,14 @@
       </p:sp>
       <p:sp>
         <p:nvSpPr>
-          <p:cNvPr id="79" name="TextBox 23"/>
+          <p:cNvPr id="120" name="TextBox 23"/>
           <p:cNvSpPr/>
           <p:nvPr/>
         </p:nvSpPr>
         <p:spPr>
           <a:xfrm>
             <a:off x="640080" y="5577840"/>
-            <a:ext cx="3108240" cy="836280"/>
+            <a:ext cx="3107880" cy="836280"/>
           </a:xfrm>
           <a:prstGeom prst="rect">
             <a:avLst/>
@@ -9353,14 +12371,14 @@
       </p:sp>
       <p:sp>
         <p:nvSpPr>
-          <p:cNvPr id="80" name="Rounded Rectangle 24"/>
+          <p:cNvPr id="121" name="Rounded Rectangle 24"/>
           <p:cNvSpPr/>
           <p:nvPr/>
         </p:nvSpPr>
         <p:spPr>
           <a:xfrm>
             <a:off x="4206240" y="4846320"/>
-            <a:ext cx="3474000" cy="1645200"/>
+            <a:ext cx="3473640" cy="1644840"/>
           </a:xfrm>
           <a:prstGeom prst="roundRect">
             <a:avLst>
@@ -9415,14 +12433,14 @@
       </p:sp>
       <p:sp>
         <p:nvSpPr>
-          <p:cNvPr id="81" name="TextBox 25"/>
+          <p:cNvPr id="122" name="TextBox 25"/>
           <p:cNvSpPr/>
           <p:nvPr/>
         </p:nvSpPr>
         <p:spPr>
           <a:xfrm>
             <a:off x="4389120" y="5029200"/>
-            <a:ext cx="3108240" cy="363960"/>
+            <a:ext cx="3107880" cy="363960"/>
           </a:xfrm>
           <a:prstGeom prst="rect">
             <a:avLst/>
@@ -9479,14 +12497,14 @@
       </p:sp>
       <p:sp>
         <p:nvSpPr>
-          <p:cNvPr id="82" name="TextBox 26"/>
+          <p:cNvPr id="123" name="TextBox 26"/>
           <p:cNvSpPr/>
           <p:nvPr/>
         </p:nvSpPr>
         <p:spPr>
           <a:xfrm>
             <a:off x="4389120" y="5486400"/>
-            <a:ext cx="3108240" cy="836280"/>
+            <a:ext cx="3107880" cy="836280"/>
           </a:xfrm>
           <a:prstGeom prst="rect">
             <a:avLst/>
@@ -9562,14 +12580,14 @@
       </p:sp>
       <p:sp>
         <p:nvSpPr>
-          <p:cNvPr id="83" name="Rounded Rectangle 27"/>
+          <p:cNvPr id="124" name="Rounded Rectangle 27"/>
           <p:cNvSpPr/>
           <p:nvPr/>
         </p:nvSpPr>
         <p:spPr>
           <a:xfrm>
             <a:off x="7955280" y="4846320"/>
-            <a:ext cx="3474000" cy="1645200"/>
+            <a:ext cx="3473640" cy="1644840"/>
           </a:xfrm>
           <a:prstGeom prst="roundRect">
             <a:avLst>
@@ -9624,14 +12642,14 @@
       </p:sp>
       <p:sp>
         <p:nvSpPr>
-          <p:cNvPr id="84" name="TextBox 28"/>
+          <p:cNvPr id="125" name="TextBox 28"/>
           <p:cNvSpPr/>
           <p:nvPr/>
         </p:nvSpPr>
         <p:spPr>
           <a:xfrm>
             <a:off x="8138160" y="5029200"/>
-            <a:ext cx="3108240" cy="363960"/>
+            <a:ext cx="3107880" cy="363960"/>
           </a:xfrm>
           <a:prstGeom prst="rect">
             <a:avLst/>
@@ -9688,14 +12706,14 @@
       </p:sp>
       <p:sp>
         <p:nvSpPr>
-          <p:cNvPr id="85" name="TextBox 29"/>
+          <p:cNvPr id="126" name="TextBox 29"/>
           <p:cNvSpPr/>
           <p:nvPr/>
         </p:nvSpPr>
         <p:spPr>
           <a:xfrm>
             <a:off x="8138160" y="5577840"/>
-            <a:ext cx="3108240" cy="836280"/>
+            <a:ext cx="3107880" cy="836280"/>
           </a:xfrm>
           <a:prstGeom prst="rect">
             <a:avLst/>
@@ -9808,14 +12826,14 @@
       </p:grpSpPr>
       <p:sp>
         <p:nvSpPr>
-          <p:cNvPr id="86" name="TextBox 1"/>
+          <p:cNvPr id="127" name="TextBox 1"/>
           <p:cNvSpPr/>
           <p:nvPr/>
         </p:nvSpPr>
         <p:spPr>
           <a:xfrm>
             <a:off x="731520" y="274320"/>
-            <a:ext cx="10667160" cy="638280"/>
+            <a:ext cx="10666800" cy="638280"/>
           </a:xfrm>
           <a:prstGeom prst="rect">
             <a:avLst/>
@@ -9862,14 +12880,14 @@
       </p:sp>
       <p:sp>
         <p:nvSpPr>
-          <p:cNvPr id="87" name="Rectangle 2"/>
+          <p:cNvPr id="128" name="Rectangle 2"/>
           <p:cNvSpPr/>
           <p:nvPr/>
         </p:nvSpPr>
         <p:spPr>
           <a:xfrm>
             <a:off x="731520" y="822960"/>
-            <a:ext cx="1828080" cy="45000"/>
+            <a:ext cx="1827720" cy="44640"/>
           </a:xfrm>
           <a:prstGeom prst="rect">
             <a:avLst/>
@@ -9922,14 +12940,14 @@
       </p:sp>
       <p:sp>
         <p:nvSpPr>
-          <p:cNvPr id="88" name="TextBox 3"/>
+          <p:cNvPr id="129" name="TextBox 3"/>
           <p:cNvSpPr/>
           <p:nvPr/>
         </p:nvSpPr>
         <p:spPr>
           <a:xfrm>
             <a:off x="731520" y="1005840"/>
-            <a:ext cx="10667160" cy="1490760"/>
+            <a:ext cx="10666800" cy="1490760"/>
           </a:xfrm>
           <a:prstGeom prst="rect">
             <a:avLst/>
@@ -10133,14 +13151,14 @@
       </p:sp>
       <p:sp>
         <p:nvSpPr>
-          <p:cNvPr id="89" name="TextBox 4"/>
+          <p:cNvPr id="130" name="TextBox 4"/>
           <p:cNvSpPr/>
           <p:nvPr/>
         </p:nvSpPr>
         <p:spPr>
           <a:xfrm>
             <a:off x="731520" y="2099880"/>
-            <a:ext cx="10667160" cy="302400"/>
+            <a:ext cx="10666800" cy="302040"/>
           </a:xfrm>
           <a:prstGeom prst="rect">
             <a:avLst/>
@@ -10178,14 +13196,14 @@
       </p:sp>
       <p:sp>
         <p:nvSpPr>
-          <p:cNvPr id="90" name="TextBox 5"/>
+          <p:cNvPr id="131" name="TextBox 5"/>
           <p:cNvSpPr/>
           <p:nvPr/>
         </p:nvSpPr>
         <p:spPr>
           <a:xfrm>
             <a:off x="731520" y="5600160"/>
-            <a:ext cx="10667160" cy="272160"/>
+            <a:ext cx="10666800" cy="272160"/>
           </a:xfrm>
           <a:prstGeom prst="rect">
             <a:avLst/>
@@ -10232,7 +13250,7 @@
       </p:sp>
       <p:pic>
         <p:nvPicPr>
-          <p:cNvPr id="91" name="Picture 1" descr="img_075386f0ff01.png"/>
+          <p:cNvPr id="132" name="Picture 1" descr="img_075386f0ff01.png"/>
           <p:cNvPicPr/>
           <p:nvPr/>
         </p:nvPicPr>
@@ -10243,7 +13261,7 @@
         <p:spPr>
           <a:xfrm>
             <a:off x="804960" y="2743200"/>
-            <a:ext cx="5199120" cy="2626200"/>
+            <a:ext cx="5198760" cy="2625840"/>
           </a:xfrm>
           <a:prstGeom prst="rect">
             <a:avLst/>
@@ -10255,7 +13273,7 @@
       </p:pic>
       <p:pic>
         <p:nvPicPr>
-          <p:cNvPr id="92" name="Picture 5" descr="img_8b25f51cc27b.png"/>
+          <p:cNvPr id="133" name="Picture 5" descr="img_8b25f51cc27b.png"/>
           <p:cNvPicPr/>
           <p:nvPr/>
         </p:nvPicPr>
@@ -10266,7 +13284,7 @@
         <p:spPr>
           <a:xfrm>
             <a:off x="6629400" y="2514600"/>
-            <a:ext cx="5199120" cy="2971080"/>
+            <a:ext cx="5198760" cy="2970720"/>
           </a:xfrm>
           <a:prstGeom prst="rect">
             <a:avLst/>
@@ -10315,14 +13333,14 @@
       </p:grpSpPr>
       <p:sp>
         <p:nvSpPr>
-          <p:cNvPr id="93" name="TextBox 1"/>
+          <p:cNvPr id="134" name="TextBox 1"/>
           <p:cNvSpPr/>
           <p:nvPr/>
         </p:nvSpPr>
         <p:spPr>
           <a:xfrm>
             <a:off x="731520" y="274320"/>
-            <a:ext cx="10667160" cy="638280"/>
+            <a:ext cx="10666800" cy="638280"/>
           </a:xfrm>
           <a:prstGeom prst="rect">
             <a:avLst/>
@@ -10369,14 +13387,14 @@
       </p:sp>
       <p:sp>
         <p:nvSpPr>
-          <p:cNvPr id="94" name="Rectangle 2"/>
+          <p:cNvPr id="135" name="Rectangle 2"/>
           <p:cNvSpPr/>
           <p:nvPr/>
         </p:nvSpPr>
         <p:spPr>
           <a:xfrm>
             <a:off x="731520" y="822960"/>
-            <a:ext cx="1828080" cy="45000"/>
+            <a:ext cx="1827720" cy="44640"/>
           </a:xfrm>
           <a:prstGeom prst="rect">
             <a:avLst/>
@@ -10429,14 +13447,14 @@
       </p:sp>
       <p:sp>
         <p:nvSpPr>
-          <p:cNvPr id="95" name="TextBox 3"/>
+          <p:cNvPr id="136" name="TextBox 3"/>
           <p:cNvSpPr/>
           <p:nvPr/>
         </p:nvSpPr>
         <p:spPr>
           <a:xfrm>
             <a:off x="731520" y="1005840"/>
-            <a:ext cx="10667160" cy="2130840"/>
+            <a:ext cx="10666800" cy="2130840"/>
           </a:xfrm>
           <a:prstGeom prst="rect">
             <a:avLst/>
@@ -10692,7 +13710,7 @@
       </p:sp>
       <p:pic>
         <p:nvPicPr>
-          <p:cNvPr id="96" name="Picture 4" descr="img_a742acf3e578.png"/>
+          <p:cNvPr id="137" name="Picture 4" descr="img_a742acf3e578.png"/>
           <p:cNvPicPr/>
           <p:nvPr/>
         </p:nvPicPr>
@@ -10703,7 +13721,7 @@
         <p:spPr>
           <a:xfrm>
             <a:off x="1601640" y="3200400"/>
-            <a:ext cx="9599400" cy="2898720"/>
+            <a:ext cx="9599040" cy="2898360"/>
           </a:xfrm>
           <a:prstGeom prst="rect">
             <a:avLst/>
@@ -10715,14 +13733,14 @@
       </p:pic>
       <p:sp>
         <p:nvSpPr>
-          <p:cNvPr id="97" name="TextBox 5"/>
+          <p:cNvPr id="138" name="TextBox 5"/>
           <p:cNvSpPr/>
           <p:nvPr/>
         </p:nvSpPr>
         <p:spPr>
           <a:xfrm>
             <a:off x="731520" y="6249960"/>
-            <a:ext cx="10667160" cy="272160"/>
+            <a:ext cx="10666800" cy="272160"/>
           </a:xfrm>
           <a:prstGeom prst="rect">
             <a:avLst/>
@@ -10757,6 +13775,364 @@
                 <a:ea typeface="DejaVu Sans"/>
               </a:rPr>
               <a:t>config.properties  •  GitHub Secrets  •  mvn test  •  Allure publish</a:t>
+            </a:r>
+            <a:endParaRPr b="0" lang="en-US" sz="1200" spc="-1" strike="noStrike">
+              <a:solidFill>
+                <a:srgbClr val="000000"/>
+              </a:solidFill>
+              <a:latin typeface="Arial"/>
+            </a:endParaRPr>
+          </a:p>
+        </p:txBody>
+      </p:sp>
+    </p:spTree>
+  </p:cSld>
+  <mc:AlternateContent>
+    <mc:Choice Requires="p14">
+      <p:transition spd="slow" p14:dur="2000"/>
+    </mc:Choice>
+    <mc:Fallback>
+      <p:transition spd="slow"/>
+    </mc:Fallback>
+  </mc:AlternateContent>
+</p:sld>
+</file>
+
+<file path=ppt/slides/slide8.xml><?xml version="1.0" encoding="utf-8"?>
+<p:sld xmlns:a="http://schemas.openxmlformats.org/drawingml/2006/main" xmlns:p="http://schemas.openxmlformats.org/presentationml/2006/main" xmlns:r="http://schemas.openxmlformats.org/officeDocument/2006/relationships" xmlns:p14="http://schemas.microsoft.com/office/powerpoint/2010/main" xmlns:p15="http://schemas.microsoft.com/office/powerpoint/2012/main" xmlns:mc="http://schemas.openxmlformats.org/markup-compatibility/2006">
+  <p:cSld>
+    <p:bg>
+      <p:bgPr>
+        <a:solidFill>
+          <a:srgbClr val="ffffff"/>
+        </a:solidFill>
+      </p:bgPr>
+    </p:bg>
+    <p:spTree>
+      <p:nvGrpSpPr>
+        <p:cNvPr id="1" name=""/>
+        <p:cNvGrpSpPr/>
+        <p:nvPr/>
+      </p:nvGrpSpPr>
+      <p:grpSpPr>
+        <a:xfrm>
+          <a:off x="0" y="0"/>
+          <a:ext cx="0" cy="0"/>
+          <a:chOff x="0" y="0"/>
+          <a:chExt cx="0" cy="0"/>
+        </a:xfrm>
+      </p:grpSpPr>
+      <p:sp>
+        <p:nvSpPr>
+          <p:cNvPr id="139" name="TextBox 9"/>
+          <p:cNvSpPr/>
+          <p:nvPr/>
+        </p:nvSpPr>
+        <p:spPr>
+          <a:xfrm>
+            <a:off x="731520" y="274320"/>
+            <a:ext cx="10667520" cy="638280"/>
+          </a:xfrm>
+          <a:prstGeom prst="rect">
+            <a:avLst/>
+          </a:prstGeom>
+          <a:noFill/>
+          <a:ln w="0">
+            <a:noFill/>
+          </a:ln>
+        </p:spPr>
+        <p:style>
+          <a:lnRef idx="0"/>
+          <a:fillRef idx="0"/>
+          <a:effectRef idx="0"/>
+          <a:fontRef idx="minor"/>
+        </p:style>
+        <p:txBody>
+          <a:bodyPr lIns="90000" rIns="90000" tIns="45000" bIns="45000" anchor="t">
+            <a:spAutoFit/>
+          </a:bodyPr>
+          <a:p>
+            <a:pPr>
+              <a:lnSpc>
+                <a:spcPct val="100000"/>
+              </a:lnSpc>
+            </a:pPr>
+            <a:r>
+              <a:rPr b="1" lang="en-US" sz="3600" spc="-1" strike="noStrike">
+                <a:solidFill>
+                  <a:srgbClr val="1a1a2e"/>
+                </a:solidFill>
+                <a:latin typeface="Calibri"/>
+              </a:rPr>
+              <a:t>✅ </a:t>
+            </a:r>
+            <a:r>
+              <a:rPr b="1" lang="en-US" sz="3600" spc="-1" strike="noStrike">
+                <a:solidFill>
+                  <a:srgbClr val="1a1a2e"/>
+                </a:solidFill>
+                <a:latin typeface="Calibri"/>
+              </a:rPr>
+              <a:t>Успешный прогон тестов в CI</a:t>
+            </a:r>
+            <a:endParaRPr b="0" lang="en-US" sz="3600" spc="-1" strike="noStrike">
+              <a:solidFill>
+                <a:srgbClr val="000000"/>
+              </a:solidFill>
+              <a:latin typeface="Arial"/>
+            </a:endParaRPr>
+          </a:p>
+        </p:txBody>
+      </p:sp>
+      <p:sp>
+        <p:nvSpPr>
+          <p:cNvPr id="140" name="Rectangle 3"/>
+          <p:cNvSpPr/>
+          <p:nvPr/>
+        </p:nvSpPr>
+        <p:spPr>
+          <a:xfrm>
+            <a:off x="731520" y="822960"/>
+            <a:ext cx="1828440" cy="45360"/>
+          </a:xfrm>
+          <a:prstGeom prst="rect">
+            <a:avLst/>
+          </a:prstGeom>
+          <a:solidFill>
+            <a:srgbClr val="2ecc71"/>
+          </a:solidFill>
+          <a:ln>
+            <a:noFill/>
+          </a:ln>
+          <a:effectLst>
+            <a:outerShdw blurRad="39960" dir="5400000" dist="23040" rotWithShape="0">
+              <a:srgbClr val="000000">
+                <a:alpha val="35000"/>
+              </a:srgbClr>
+            </a:outerShdw>
+          </a:effectLst>
+        </p:spPr>
+        <p:style>
+          <a:lnRef idx="1">
+            <a:schemeClr val="accent1"/>
+          </a:lnRef>
+          <a:fillRef idx="3">
+            <a:schemeClr val="accent1"/>
+          </a:fillRef>
+          <a:effectRef idx="2">
+            <a:schemeClr val="accent1"/>
+          </a:effectRef>
+          <a:fontRef idx="minor"/>
+        </p:style>
+        <p:txBody>
+          <a:bodyPr lIns="90000" rIns="90000" tIns="720" bIns="720" anchor="ctr">
+            <a:noAutofit/>
+          </a:bodyPr>
+          <a:p>
+            <a:endParaRPr b="0" lang="en-US" sz="1800" spc="-1" strike="noStrike">
+              <a:solidFill>
+                <a:schemeClr val="lt1"/>
+              </a:solidFill>
+              <a:latin typeface="Calibri"/>
+            </a:endParaRPr>
+          </a:p>
+        </p:txBody>
+      </p:sp>
+      <p:pic>
+        <p:nvPicPr>
+          <p:cNvPr id="141" name="Picture 3" descr="img_c7d5b27c12b3.png"/>
+          <p:cNvPicPr/>
+          <p:nvPr/>
+        </p:nvPicPr>
+        <p:blipFill>
+          <a:blip r:embed="rId1"/>
+          <a:stretch/>
+        </p:blipFill>
+        <p:spPr>
+          <a:xfrm>
+            <a:off x="704520" y="1828800"/>
+            <a:ext cx="5299560" cy="3042360"/>
+          </a:xfrm>
+          <a:prstGeom prst="rect">
+            <a:avLst/>
+          </a:prstGeom>
+          <a:ln w="0">
+            <a:noFill/>
+          </a:ln>
+        </p:spPr>
+      </p:pic>
+      <p:pic>
+        <p:nvPicPr>
+          <p:cNvPr id="142" name="Picture 6" descr="img_8b94b200b6a7.png"/>
+          <p:cNvPicPr/>
+          <p:nvPr/>
+        </p:nvPicPr>
+        <p:blipFill>
+          <a:blip r:embed="rId2"/>
+          <a:stretch/>
+        </p:blipFill>
+        <p:spPr>
+          <a:xfrm>
+            <a:off x="6187320" y="1828800"/>
+            <a:ext cx="5299560" cy="3042360"/>
+          </a:xfrm>
+          <a:prstGeom prst="rect">
+            <a:avLst/>
+          </a:prstGeom>
+          <a:ln w="0">
+            <a:noFill/>
+          </a:ln>
+        </p:spPr>
+      </p:pic>
+      <p:sp>
+        <p:nvSpPr>
+          <p:cNvPr id="143" name="TextBox 12"/>
+          <p:cNvSpPr/>
+          <p:nvPr/>
+        </p:nvSpPr>
+        <p:spPr>
+          <a:xfrm>
+            <a:off x="704520" y="4899960"/>
+            <a:ext cx="5299560" cy="257040"/>
+          </a:xfrm>
+          <a:prstGeom prst="rect">
+            <a:avLst/>
+          </a:prstGeom>
+          <a:noFill/>
+          <a:ln w="0">
+            <a:noFill/>
+          </a:ln>
+        </p:spPr>
+        <p:style>
+          <a:lnRef idx="0"/>
+          <a:fillRef idx="0"/>
+          <a:effectRef idx="0"/>
+          <a:fontRef idx="minor"/>
+        </p:style>
+        <p:txBody>
+          <a:bodyPr lIns="90000" rIns="90000" tIns="45000" bIns="45000" anchor="t">
+            <a:spAutoFit/>
+          </a:bodyPr>
+          <a:p>
+            <a:pPr algn="ctr">
+              <a:lnSpc>
+                <a:spcPct val="100000"/>
+              </a:lnSpc>
+            </a:pPr>
+            <a:r>
+              <a:rPr b="0" lang="en-US" sz="1100" spc="-1" strike="noStrike">
+                <a:solidFill>
+                  <a:srgbClr val="888b8e"/>
+                </a:solidFill>
+                <a:latin typeface="Calibri"/>
+              </a:rPr>
+              <a:t>Лог прогона тестов</a:t>
+            </a:r>
+            <a:endParaRPr b="0" lang="en-US" sz="1100" spc="-1" strike="noStrike">
+              <a:solidFill>
+                <a:srgbClr val="000000"/>
+              </a:solidFill>
+              <a:latin typeface="Arial"/>
+            </a:endParaRPr>
+          </a:p>
+        </p:txBody>
+      </p:sp>
+      <p:sp>
+        <p:nvSpPr>
+          <p:cNvPr id="144" name="TextBox 15"/>
+          <p:cNvSpPr/>
+          <p:nvPr/>
+        </p:nvSpPr>
+        <p:spPr>
+          <a:xfrm>
+            <a:off x="6187320" y="4899960"/>
+            <a:ext cx="5299560" cy="257040"/>
+          </a:xfrm>
+          <a:prstGeom prst="rect">
+            <a:avLst/>
+          </a:prstGeom>
+          <a:noFill/>
+          <a:ln w="0">
+            <a:noFill/>
+          </a:ln>
+        </p:spPr>
+        <p:style>
+          <a:lnRef idx="0"/>
+          <a:fillRef idx="0"/>
+          <a:effectRef idx="0"/>
+          <a:fontRef idx="minor"/>
+        </p:style>
+        <p:txBody>
+          <a:bodyPr lIns="90000" rIns="90000" tIns="45000" bIns="45000" anchor="t">
+            <a:spAutoFit/>
+          </a:bodyPr>
+          <a:p>
+            <a:pPr algn="ctr">
+              <a:lnSpc>
+                <a:spcPct val="100000"/>
+              </a:lnSpc>
+            </a:pPr>
+            <a:r>
+              <a:rPr b="0" lang="en-US" sz="1100" spc="-1" strike="noStrike">
+                <a:solidFill>
+                  <a:srgbClr val="888b8e"/>
+                </a:solidFill>
+                <a:latin typeface="Calibri"/>
+              </a:rPr>
+              <a:t>Результат — все тесты прошли</a:t>
+            </a:r>
+            <a:endParaRPr b="0" lang="en-US" sz="1100" spc="-1" strike="noStrike">
+              <a:solidFill>
+                <a:srgbClr val="000000"/>
+              </a:solidFill>
+              <a:latin typeface="Arial"/>
+            </a:endParaRPr>
+          </a:p>
+        </p:txBody>
+      </p:sp>
+      <p:sp>
+        <p:nvSpPr>
+          <p:cNvPr id="145" name="TextBox 18"/>
+          <p:cNvSpPr/>
+          <p:nvPr/>
+        </p:nvSpPr>
+        <p:spPr>
+          <a:xfrm>
+            <a:off x="731520" y="5600160"/>
+            <a:ext cx="10667520" cy="272160"/>
+          </a:xfrm>
+          <a:prstGeom prst="rect">
+            <a:avLst/>
+          </a:prstGeom>
+          <a:noFill/>
+          <a:ln w="0">
+            <a:noFill/>
+          </a:ln>
+        </p:spPr>
+        <p:style>
+          <a:lnRef idx="0"/>
+          <a:fillRef idx="0"/>
+          <a:effectRef idx="0"/>
+          <a:fontRef idx="minor"/>
+        </p:style>
+        <p:txBody>
+          <a:bodyPr lIns="90000" rIns="90000" tIns="45000" bIns="45000" anchor="t">
+            <a:spAutoFit/>
+          </a:bodyPr>
+          <a:p>
+            <a:pPr algn="ctr">
+              <a:lnSpc>
+                <a:spcPct val="100000"/>
+              </a:lnSpc>
+            </a:pPr>
+            <a:r>
+              <a:rPr b="0" lang="en-US" sz="1200" spc="-1" strike="noStrike">
+                <a:solidFill>
+                  <a:srgbClr val="888b8e"/>
+                </a:solidFill>
+                <a:latin typeface="Calibri"/>
+              </a:rPr>
+              <a:t>Тесты запускаются автоматически при push. Зелёный билд = можно мёржить.</a:t>
             </a:r>
             <a:endParaRPr b="0" lang="en-US" sz="1200" spc="-1" strike="noStrike">
               <a:solidFill>
@@ -10981,4 +14357,207 @@
     </a:fmtScheme>
   </a:themeElements>
 </a:theme>
+</file>
+
+<file path=ppt/theme/theme2.xml><?xml version="1.0" encoding="utf-8"?>
+<a:theme xmlns:a="http://schemas.openxmlformats.org/drawingml/2006/main" name="Office Theme">
+  <a:themeElements>
+    <a:clrScheme name="Office">
+      <a:dk1>
+        <a:sysClr val="windowText" lastClr="000000"/>
+      </a:dk1>
+      <a:lt1>
+        <a:sysClr val="window" lastClr="FFFFFF"/>
+      </a:lt1>
+      <a:dk2>
+        <a:srgbClr val="1f497d"/>
+      </a:dk2>
+      <a:lt2>
+        <a:srgbClr val="eeece1"/>
+      </a:lt2>
+      <a:accent1>
+        <a:srgbClr val="4f81bd"/>
+      </a:accent1>
+      <a:accent2>
+        <a:srgbClr val="c0504d"/>
+      </a:accent2>
+      <a:accent3>
+        <a:srgbClr val="9bbb59"/>
+      </a:accent3>
+      <a:accent4>
+        <a:srgbClr val="8064a2"/>
+      </a:accent4>
+      <a:accent5>
+        <a:srgbClr val="4bacc6"/>
+      </a:accent5>
+      <a:accent6>
+        <a:srgbClr val="f79646"/>
+      </a:accent6>
+      <a:hlink>
+        <a:srgbClr val="0000ff"/>
+      </a:hlink>
+      <a:folHlink>
+        <a:srgbClr val="800080"/>
+      </a:folHlink>
+    </a:clrScheme>
+    <a:fontScheme name="Office">
+      <a:majorFont>
+        <a:latin typeface="Arial"/>
+        <a:ea typeface="DejaVu Sans"/>
+        <a:cs typeface="DejaVu Sans"/>
+      </a:majorFont>
+      <a:minorFont>
+        <a:latin typeface="Arial"/>
+        <a:ea typeface="DejaVu Sans"/>
+        <a:cs typeface="DejaVu Sans"/>
+      </a:minorFont>
+    </a:fontScheme>
+    <a:fmtScheme name="Office">
+      <a:fillStyleLst>
+        <a:solidFill>
+          <a:schemeClr val="phClr"/>
+        </a:solidFill>
+        <a:gradFill rotWithShape="1">
+          <a:gsLst>
+            <a:gs pos="0">
+              <a:schemeClr val="phClr">
+                <a:tint val="50000"/>
+                <a:satMod val="300000"/>
+              </a:schemeClr>
+            </a:gs>
+            <a:gs pos="35000">
+              <a:schemeClr val="phClr">
+                <a:tint val="37000"/>
+                <a:satMod val="300000"/>
+              </a:schemeClr>
+            </a:gs>
+            <a:gs pos="100000">
+              <a:schemeClr val="phClr">
+                <a:tint val="15000"/>
+                <a:satMod val="350000"/>
+              </a:schemeClr>
+            </a:gs>
+          </a:gsLst>
+          <a:lin ang="16200000" scaled="1"/>
+        </a:gradFill>
+        <a:gradFill rotWithShape="1">
+          <a:gsLst>
+            <a:gs pos="0">
+              <a:schemeClr val="phClr">
+                <a:shade val="51000"/>
+                <a:satMod val="130000"/>
+              </a:schemeClr>
+            </a:gs>
+            <a:gs pos="80000">
+              <a:schemeClr val="phClr">
+                <a:shade val="93000"/>
+                <a:satMod val="130000"/>
+              </a:schemeClr>
+            </a:gs>
+            <a:gs pos="100000">
+              <a:schemeClr val="phClr">
+                <a:shade val="94000"/>
+                <a:satMod val="135000"/>
+              </a:schemeClr>
+            </a:gs>
+          </a:gsLst>
+          <a:lin ang="16200000" scaled="0"/>
+        </a:gradFill>
+      </a:fillStyleLst>
+      <a:lnStyleLst>
+        <a:ln w="6350" cap="flat" cmpd="sng" algn="ctr">
+          <a:solidFill>
+            <a:schemeClr val="phClr">
+              <a:shade val="95000"/>
+              <a:satMod val="105000"/>
+            </a:schemeClr>
+          </a:solidFill>
+          <a:prstDash val="solid"/>
+          <a:miter/>
+        </a:ln>
+        <a:ln w="12700" cap="flat" cmpd="sng" algn="ctr">
+          <a:solidFill>
+            <a:schemeClr val="phClr"/>
+          </a:solidFill>
+          <a:prstDash val="solid"/>
+          <a:miter/>
+        </a:ln>
+        <a:ln w="19050" cap="flat" cmpd="sng" algn="ctr">
+          <a:solidFill>
+            <a:schemeClr val="phClr"/>
+          </a:solidFill>
+          <a:prstDash val="solid"/>
+          <a:miter/>
+        </a:ln>
+      </a:lnStyleLst>
+      <a:effectStyleLst>
+        <a:effectStyle>
+          <a:effectLst/>
+        </a:effectStyle>
+        <a:effectStyle>
+          <a:effectLst/>
+        </a:effectStyle>
+        <a:effectStyle>
+          <a:effectLst>
+            <a:outerShdw blurRad="40000" dist="23000" dir="5400000" rotWithShape="0">
+              <a:srgbClr val="000000">
+                <a:alpha val="35000"/>
+              </a:srgbClr>
+            </a:outerShdw>
+          </a:effectLst>
+        </a:effectStyle>
+      </a:effectStyleLst>
+      <a:bgFillStyleLst>
+        <a:solidFill>
+          <a:schemeClr val="phClr"/>
+        </a:solidFill>
+        <a:gradFill rotWithShape="1">
+          <a:gsLst>
+            <a:gs pos="0">
+              <a:schemeClr val="phClr">
+                <a:tint val="40000"/>
+                <a:satMod val="350000"/>
+              </a:schemeClr>
+            </a:gs>
+            <a:gs pos="40000">
+              <a:schemeClr val="phClr">
+                <a:tint val="45000"/>
+                <a:shade val="99000"/>
+                <a:satMod val="350000"/>
+              </a:schemeClr>
+            </a:gs>
+            <a:gs pos="100000">
+              <a:schemeClr val="phClr">
+                <a:shade val="20000"/>
+                <a:satMod val="255000"/>
+              </a:schemeClr>
+            </a:gs>
+          </a:gsLst>
+          <a:path path="circle">
+            <a:fillToRect l="50000" t="-80000" r="50000" b="180000"/>
+          </a:path>
+        </a:gradFill>
+        <a:gradFill rotWithShape="1">
+          <a:gsLst>
+            <a:gs pos="0">
+              <a:schemeClr val="phClr">
+                <a:tint val="80000"/>
+                <a:satMod val="300000"/>
+              </a:schemeClr>
+            </a:gs>
+            <a:gs pos="100000">
+              <a:schemeClr val="phClr">
+                <a:shade val="30000"/>
+                <a:satMod val="200000"/>
+              </a:schemeClr>
+            </a:gs>
+          </a:gsLst>
+          <a:path path="circle">
+            <a:fillToRect l="50000" t="50000" r="50000" b="50000"/>
+          </a:path>
+        </a:gradFill>
+      </a:bgFillStyleLst>
+    </a:fmtScheme>
+  </a:themeElements>
+</a:theme>
 </file>